--- a/examples/e-flugzeuge/read/deck.pptx
+++ b/examples/e-flugzeuge/read/deck.pptx
@@ -121,7 +121,7 @@
     <c:plotArea>
       <c:layout/>
       <c:barChart>
-        <c:barDir val="col"/>
+        <c:barDir val="bar"/>
         <c:grouping val="clustered"/>
         <c:varyColors val="0"/>
         <c:ser>
@@ -133,20 +133,20 @@
               <c:strCache>
                 <c:ptCount val="1"/>
                 <c:pt idx="0">
-                  <c:v>Strecken</c:v>
+                  <c:v>ct je Sitzkilometer</c:v>
                 </c:pt>
               </c:strCache>
             </c:strRef>
           </c:tx>
           <c:spPr>
             <a:solidFill>
-              <a:srgbClr val="C2410C"/>
+              <a:srgbClr val="7B8794"/>
             </a:solidFill>
             <a:effectLst/>
           </c:spPr>
           <c:invertIfNegative val="0"/>
           <c:dLbls>
-            <c:numFmt formatCode="#,##0" sourceLinked="0"/>
+            <c:numFmt formatCode="0.0" sourceLinked="0"/>
             <c:txPr>
               <a:bodyPr/>
               <a:lstStyle/>
@@ -175,7 +175,7 @@
             <c:bubble3D val="0"/>
             <c:spPr>
               <a:solidFill>
-                <a:srgbClr val="C2410C"/>
+                <a:srgbClr val="7B8794"/>
               </a:solidFill>
               <a:effectLst/>
             </c:spPr>
@@ -191,45 +191,17 @@
               <a:effectLst/>
             </c:spPr>
           </c:dPt>
-          <c:dPt>
-            <c:idx val="2"/>
-            <c:invertIfNegative val="0"/>
-            <c:bubble3D val="0"/>
-            <c:spPr>
-              <a:solidFill>
-                <a:srgbClr val="7B8794"/>
-              </a:solidFill>
-              <a:effectLst/>
-            </c:spPr>
-          </c:dPt>
-          <c:dPt>
-            <c:idx val="3"/>
-            <c:invertIfNegative val="0"/>
-            <c:bubble3D val="0"/>
-            <c:spPr>
-              <a:solidFill>
-                <a:srgbClr val="7B8794"/>
-              </a:solidFill>
-              <a:effectLst/>
-            </c:spPr>
-          </c:dPt>
           <c:cat>
             <c:multiLvlStrRef>
-              <c:f>Sheet1!$A$2:$A$5</c:f>
+              <c:f>Sheet1!$A$2:$A$3</c:f>
               <c:multiLvlStrCache>
-                <c:ptCount val="4"/>
+                <c:ptCount val="2"/>
                 <c:lvl>
                   <c:pt idx="0">
-                    <c:v>bis 150 km</c:v>
+                    <c:v>Turboprop</c:v>
                   </c:pt>
                   <c:pt idx="1">
-                    <c:v>150 bis 320 km</c:v>
-                  </c:pt>
-                  <c:pt idx="2">
-                    <c:v>320 bis 500 km</c:v>
-                  </c:pt>
-                  <c:pt idx="3">
-                    <c:v>über 500 km</c:v>
+                    <c:v>E-Flugzeug</c:v>
                   </c:pt>
                 </c:lvl>
               </c:multiLvlStrCache>
@@ -237,28 +209,22 @@
           </c:cat>
           <c:val>
             <c:numRef>
-              <c:f>Sheet1!$B$2:$B$5</c:f>
+              <c:f>Sheet1!$B$2:$B$3</c:f>
               <c:numCache>
                 <c:formatCode>General</c:formatCode>
-                <c:ptCount val="4"/>
+                <c:ptCount val="2"/>
                 <c:pt idx="0">
-                  <c:v>5</c:v>
+                  <c:v>14.2</c:v>
                 </c:pt>
                 <c:pt idx="1">
-                  <c:v>9</c:v>
-                </c:pt>
-                <c:pt idx="2">
-                  <c:v>8</c:v>
-                </c:pt>
-                <c:pt idx="3">
-                  <c:v>8</c:v>
+                  <c:v>11.1</c:v>
                 </c:pt>
               </c:numCache>
             </c:numRef>
           </c:val>
         </c:ser>
         <c:dLbls>
-          <c:numFmt formatCode="#,##0" sourceLinked="0"/>
+          <c:numFmt formatCode="0.0" sourceLinked="0"/>
           <c:txPr>
             <a:bodyPr/>
             <a:lstStyle/>
@@ -281,7 +247,7 @@
           <c:showBubbleSize val="0"/>
           <c:showLeaderLines val="0"/>
         </c:dLbls>
-        <c:gapWidth val="60"/>
+        <c:gapWidth val="40"/>
         <c:overlap val="0"/>
         <c:axId val="2094734554"/>
         <c:axId val="2094734552"/>
@@ -290,14 +256,14 @@
       <c:catAx>
         <c:axId val="2094734554"/>
         <c:scaling>
-          <c:orientation val="minMax"/>
+          <c:orientation val="maxMin"/>
         </c:scaling>
         <c:delete val="0"/>
-        <c:axPos val="b"/>
+        <c:axPos val="l"/>
         <c:numFmt formatCode="General" sourceLinked="1"/>
         <c:majorTickMark val="out"/>
         <c:minorTickMark val="none"/>
-        <c:tickLblPos val="low"/>
+        <c:tickLblPos val="nextTo"/>
         <c:spPr>
           <a:ln w="12700" cap="flat">
             <a:solidFill>
@@ -332,13 +298,15 @@
         <c:axId val="2094734552"/>
         <c:scaling>
           <c:orientation val="minMax"/>
+          <c:max val="18"/>
+          <c:min val="0"/>
         </c:scaling>
         <c:delete val="1"/>
-        <c:axPos val="l"/>
+        <c:axPos val="b"/>
         <c:numFmt formatCode="General" sourceLinked="0"/>
         <c:majorTickMark val="out"/>
         <c:minorTickMark val="none"/>
-        <c:tickLblPos val="nextTo"/>
+        <c:tickLblPos val="low"/>
         <c:spPr>
           <a:ln w="12700" cap="flat">
             <a:solidFill>
@@ -419,7 +387,7 @@
             <a:solidFill>
               <a:srgbClr val="C2410C"/>
             </a:solidFill>
-            <a:ln w="38100" cap="flat">
+            <a:ln w="50800" cap="flat">
               <a:solidFill>
                 <a:srgbClr val="C2410C"/>
               </a:solidFill>
@@ -633,6 +601,35 @@
             </a:ln>
           </c:spPr>
         </c:majorGridlines>
+        <c:title>
+          <c:tx>
+            <c:rich>
+              <a:bodyPr/>
+              <a:lstStyle/>
+              <a:p>
+                <a:pPr>
+                  <a:defRPr sz="1400" b="0" i="0" u="none" strike="noStrike">
+                    <a:solidFill>
+                      <a:srgbClr val="1B2733"/>
+                    </a:solidFill>
+                    <a:latin typeface="Arial"/>
+                  </a:defRPr>
+                </a:pPr>
+                <a:r>
+                  <a:rPr sz="1400" b="0" i="0" u="none" strike="noStrike">
+                    <a:solidFill>
+                      <a:srgbClr val="1B2733"/>
+                    </a:solidFill>
+                    <a:latin typeface="Arial"/>
+                  </a:rPr>
+                  <a:t>Mio. €</a:t>
+                </a:r>
+              </a:p>
+            </c:rich>
+          </c:tx>
+          <c:layout/>
+          <c:overlay val="0"/>
+        </c:title>
         <c:numFmt formatCode="0" sourceLinked="0"/>
         <c:majorTickMark val="out"/>
         <c:minorTickMark val="none"/>
@@ -1631,7 +1628,7 @@
         <p:spPr>
           <a:xfrm>
             <a:off x="609600" y="2032000"/>
-            <a:ext cx="9753600" cy="1422400"/>
+            <a:ext cx="6096000" cy="2032000"/>
           </a:xfrm>
           <a:prstGeom prst="rect">
             <a:avLst/>
@@ -1659,54 +1656,6 @@
               <a:buNone/>
             </a:pPr>
             <a:endParaRPr lang="en-US" sz="4000" dirty="0"/>
-          </a:p>
-        </p:txBody>
-      </p:sp>
-      <p:sp>
-        <p:nvSpPr>
-          <p:cNvPr id="25" name="Slide Number Placeholder 0"/>
-          <p:cNvSpPr>
-            <a:spLocks noGrp="1"/>
-          </p:cNvSpPr>
-          <p:nvPr>
-            <p:ph type="sldNum" sz="quarter" idx="4294967295"/>
-          </p:nvPr>
-        </p:nvSpPr>
-        <p:spPr>
-          <a:xfrm>
-            <a:off x="10972800" y="5791200"/>
-            <a:ext cx="609600" cy="304800"/>
-          </a:xfrm>
-          <a:prstGeom prst="rect">
-            <a:avLst/>
-          </a:prstGeom>
-          <a:extLst>
-            <a:ext uri="{C572A759-6A51-4108-AA02-DFA0A04FC94B}">
-              <ma14:wrappingTextBoxFlag xmlns:ma14="http://schemas.microsoft.com/office/mac/drawingml/2011/main" val="0"/>
-            </a:ext>
-          </a:extLst>
-        </p:spPr>
-        <p:txBody>
-          <a:bodyPr/>
-          <a:lstStyle>
-            <a:lvl1pPr>
-              <a:defRPr sz="1000">
-                <a:solidFill>
-                  <a:srgbClr val="4A5866"/>
-                </a:solidFill>
-                <a:latin typeface="Arial"/>
-                <a:ea typeface="Arial"/>
-                <a:cs typeface="Arial"/>
-              </a:defRPr>
-            </a:lvl1pPr>
-          </a:lstStyle>
-          <a:p>
-            <a:pPr algn="r"/>
-            <a:fld id="{F7021451-1387-4CA6-816F-3879F97B5CBC}" type="slidenum">
-              <a:rPr b="0" lang="en-US"/>
-              <a:t>1002</a:t>
-            </a:fld>
-            <a:endParaRPr lang="en-US"/>
           </a:p>
         </p:txBody>
       </p:sp>
@@ -1753,7 +1702,7 @@
         <p:spPr>
           <a:xfrm>
             <a:off x="609600" y="609600"/>
-            <a:ext cx="10972800" cy="1016000"/>
+            <a:ext cx="10972800" cy="508000"/>
           </a:xfrm>
           <a:prstGeom prst="rect">
             <a:avLst/>
@@ -1875,7 +1824,7 @@
         <p:spPr>
           <a:xfrm>
             <a:off x="609600" y="609600"/>
-            <a:ext cx="10972800" cy="1016000"/>
+            <a:ext cx="10972800" cy="508000"/>
           </a:xfrm>
           <a:prstGeom prst="rect">
             <a:avLst/>
@@ -1962,9 +1911,16 @@
 </p:sldLayout>
 </file>
 
-<file path=ppt/slideMasters/slideMaster1.xml><?xml version="1.0" encoding="utf-8"?>
-<p:sldMaster xmlns:a="http://schemas.openxmlformats.org/drawingml/2006/main" xmlns:r="http://schemas.openxmlformats.org/officeDocument/2006/relationships" xmlns:p="http://schemas.openxmlformats.org/presentationml/2006/main">
-  <p:cSld>
+<file path=ppt/slideLayouts/slideLayout5.xml><?xml version="1.0" encoding="utf-8"?>
+<p:sldLayout xmlns:a="http://schemas.openxmlformats.org/drawingml/2006/main" xmlns:r="http://schemas.openxmlformats.org/officeDocument/2006/relationships" xmlns:p="http://schemas.openxmlformats.org/presentationml/2006/main" preserve="1">
+  <p:cSld name="map">
+    <p:bg>
+      <p:bgPr>
+        <a:solidFill>
+          <a:srgbClr val="FFFFFF"/>
+        </a:solidFill>
+      </p:bgPr>
+    </p:bg>
     <p:spTree>
       <p:nvGrpSpPr>
         <p:cNvPr id="1" name=""/>
@@ -1979,6 +1935,48 @@
           <a:chExt cx="0" cy="0"/>
         </a:xfrm>
       </p:grpSpPr>
+      <p:sp>
+        <p:nvSpPr>
+          <p:cNvPr id="2" name="Text 0"/>
+          <p:cNvSpPr/>
+          <p:nvPr>
+            <p:ph idx="100" type="title" hasCustomPrompt="1"/>
+          </p:nvPr>
+        </p:nvSpPr>
+        <p:spPr>
+          <a:xfrm>
+            <a:off x="609600" y="609600"/>
+            <a:ext cx="10972800" cy="508000"/>
+          </a:xfrm>
+          <a:prstGeom prst="rect">
+            <a:avLst/>
+          </a:prstGeom>
+          <a:noFill/>
+          <a:ln/>
+        </p:spPr>
+        <p:txBody>
+          <a:bodyPr wrap="square" rtlCol="0"/>
+          <a:lstStyle>
+            <a:lvl1pPr algn="l" indent="0" marL="0">
+              <a:buNone/>
+              <a:defRPr lang="en-US" sz="2800" b="1" dirty="0">
+                <a:solidFill>
+                  <a:srgbClr val="1B2733"/>
+                </a:solidFill>
+                <a:latin typeface="Arial" pitchFamily="34" charset="0"/>
+                <a:ea typeface="Arial" pitchFamily="34" charset="-122"/>
+                <a:cs typeface="Arial" pitchFamily="34" charset="-120"/>
+              </a:defRPr>
+            </a:lvl1pPr>
+          </a:lstStyle>
+          <a:p>
+            <a:pPr algn="l" indent="0" marL="0">
+              <a:buNone/>
+            </a:pPr>
+            <a:endParaRPr lang="en-US" sz="2800" dirty="0"/>
+          </a:p>
+        </p:txBody>
+      </p:sp>
       <p:sp>
         <p:nvSpPr>
           <p:cNvPr id="25" name="Slide Number Placeholder 0"/>
@@ -2021,6 +2019,201 @@
             <a:pPr algn="r"/>
             <a:fld id="{F7021451-1387-4CA6-816F-3879F97B5CBC}" type="slidenum">
               <a:rPr b="0" lang="en-US"/>
+              <a:t>1005</a:t>
+            </a:fld>
+            <a:endParaRPr lang="en-US"/>
+          </a:p>
+        </p:txBody>
+      </p:sp>
+    </p:spTree>
+  </p:cSld>
+  <p:clrMapOvr>
+    <a:masterClrMapping/>
+  </p:clrMapOvr>
+</p:sldLayout>
+</file>
+
+<file path=ppt/slideLayouts/slideLayout6.xml><?xml version="1.0" encoding="utf-8"?>
+<p:sldLayout xmlns:a="http://schemas.openxmlformats.org/drawingml/2006/main" xmlns:r="http://schemas.openxmlformats.org/officeDocument/2006/relationships" xmlns:p="http://schemas.openxmlformats.org/presentationml/2006/main" preserve="1">
+  <p:cSld name="timeline">
+    <p:bg>
+      <p:bgPr>
+        <a:solidFill>
+          <a:srgbClr val="FFFFFF"/>
+        </a:solidFill>
+      </p:bgPr>
+    </p:bg>
+    <p:spTree>
+      <p:nvGrpSpPr>
+        <p:cNvPr id="1" name=""/>
+        <p:cNvGrpSpPr/>
+        <p:nvPr/>
+      </p:nvGrpSpPr>
+      <p:grpSpPr>
+        <a:xfrm>
+          <a:off x="0" y="0"/>
+          <a:ext cx="0" cy="0"/>
+          <a:chOff x="0" y="0"/>
+          <a:chExt cx="0" cy="0"/>
+        </a:xfrm>
+      </p:grpSpPr>
+      <p:sp>
+        <p:nvSpPr>
+          <p:cNvPr id="2" name="Text 0"/>
+          <p:cNvSpPr/>
+          <p:nvPr>
+            <p:ph idx="100" type="title" hasCustomPrompt="1"/>
+          </p:nvPr>
+        </p:nvSpPr>
+        <p:spPr>
+          <a:xfrm>
+            <a:off x="609600" y="609600"/>
+            <a:ext cx="10972800" cy="508000"/>
+          </a:xfrm>
+          <a:prstGeom prst="rect">
+            <a:avLst/>
+          </a:prstGeom>
+          <a:noFill/>
+          <a:ln/>
+        </p:spPr>
+        <p:txBody>
+          <a:bodyPr wrap="square" rtlCol="0"/>
+          <a:lstStyle>
+            <a:lvl1pPr algn="l" indent="0" marL="0">
+              <a:buNone/>
+              <a:defRPr lang="en-US" sz="2800" b="1" dirty="0">
+                <a:solidFill>
+                  <a:srgbClr val="1B2733"/>
+                </a:solidFill>
+                <a:latin typeface="Arial" pitchFamily="34" charset="0"/>
+                <a:ea typeface="Arial" pitchFamily="34" charset="-122"/>
+                <a:cs typeface="Arial" pitchFamily="34" charset="-120"/>
+              </a:defRPr>
+            </a:lvl1pPr>
+          </a:lstStyle>
+          <a:p>
+            <a:pPr algn="l" indent="0" marL="0">
+              <a:buNone/>
+            </a:pPr>
+            <a:endParaRPr lang="en-US" sz="2800" dirty="0"/>
+          </a:p>
+        </p:txBody>
+      </p:sp>
+      <p:sp>
+        <p:nvSpPr>
+          <p:cNvPr id="25" name="Slide Number Placeholder 0"/>
+          <p:cNvSpPr>
+            <a:spLocks noGrp="1"/>
+          </p:cNvSpPr>
+          <p:nvPr>
+            <p:ph type="sldNum" sz="quarter" idx="4294967295"/>
+          </p:nvPr>
+        </p:nvSpPr>
+        <p:spPr>
+          <a:xfrm>
+            <a:off x="10972800" y="5791200"/>
+            <a:ext cx="609600" cy="304800"/>
+          </a:xfrm>
+          <a:prstGeom prst="rect">
+            <a:avLst/>
+          </a:prstGeom>
+          <a:extLst>
+            <a:ext uri="{C572A759-6A51-4108-AA02-DFA0A04FC94B}">
+              <ma14:wrappingTextBoxFlag xmlns:ma14="http://schemas.microsoft.com/office/mac/drawingml/2011/main" val="0"/>
+            </a:ext>
+          </a:extLst>
+        </p:spPr>
+        <p:txBody>
+          <a:bodyPr/>
+          <a:lstStyle>
+            <a:lvl1pPr>
+              <a:defRPr sz="1000">
+                <a:solidFill>
+                  <a:srgbClr val="4A5866"/>
+                </a:solidFill>
+                <a:latin typeface="Arial"/>
+                <a:ea typeface="Arial"/>
+                <a:cs typeface="Arial"/>
+              </a:defRPr>
+            </a:lvl1pPr>
+          </a:lstStyle>
+          <a:p>
+            <a:pPr algn="r"/>
+            <a:fld id="{F7021451-1387-4CA6-816F-3879F97B5CBC}" type="slidenum">
+              <a:rPr b="0" lang="en-US"/>
+              <a:t>1006</a:t>
+            </a:fld>
+            <a:endParaRPr lang="en-US"/>
+          </a:p>
+        </p:txBody>
+      </p:sp>
+    </p:spTree>
+  </p:cSld>
+  <p:clrMapOvr>
+    <a:masterClrMapping/>
+  </p:clrMapOvr>
+</p:sldLayout>
+</file>
+
+<file path=ppt/slideMasters/slideMaster1.xml><?xml version="1.0" encoding="utf-8"?>
+<p:sldMaster xmlns:a="http://schemas.openxmlformats.org/drawingml/2006/main" xmlns:r="http://schemas.openxmlformats.org/officeDocument/2006/relationships" xmlns:p="http://schemas.openxmlformats.org/presentationml/2006/main">
+  <p:cSld>
+    <p:spTree>
+      <p:nvGrpSpPr>
+        <p:cNvPr id="1" name=""/>
+        <p:cNvGrpSpPr/>
+        <p:nvPr/>
+      </p:nvGrpSpPr>
+      <p:grpSpPr>
+        <a:xfrm>
+          <a:off x="0" y="0"/>
+          <a:ext cx="0" cy="0"/>
+          <a:chOff x="0" y="0"/>
+          <a:chExt cx="0" cy="0"/>
+        </a:xfrm>
+      </p:grpSpPr>
+      <p:sp>
+        <p:nvSpPr>
+          <p:cNvPr id="25" name="Slide Number Placeholder 0"/>
+          <p:cNvSpPr>
+            <a:spLocks noGrp="1"/>
+          </p:cNvSpPr>
+          <p:nvPr>
+            <p:ph type="sldNum" sz="quarter" idx="4294967295"/>
+          </p:nvPr>
+        </p:nvSpPr>
+        <p:spPr>
+          <a:xfrm>
+            <a:off x="10972800" y="5791200"/>
+            <a:ext cx="609600" cy="304800"/>
+          </a:xfrm>
+          <a:prstGeom prst="rect">
+            <a:avLst/>
+          </a:prstGeom>
+          <a:extLst>
+            <a:ext uri="{C572A759-6A51-4108-AA02-DFA0A04FC94B}">
+              <ma14:wrappingTextBoxFlag xmlns:ma14="http://schemas.microsoft.com/office/mac/drawingml/2011/main" val="0"/>
+            </a:ext>
+          </a:extLst>
+        </p:spPr>
+        <p:txBody>
+          <a:bodyPr/>
+          <a:lstStyle>
+            <a:lvl1pPr>
+              <a:defRPr sz="1000">
+                <a:solidFill>
+                  <a:srgbClr val="4A5866"/>
+                </a:solidFill>
+                <a:latin typeface="Arial"/>
+                <a:ea typeface="Arial"/>
+                <a:cs typeface="Arial"/>
+              </a:defRPr>
+            </a:lvl1pPr>
+          </a:lstStyle>
+          <a:p>
+            <a:pPr algn="r"/>
+            <a:fld id="{F7021451-1387-4CA6-816F-3879F97B5CBC}" type="slidenum">
+              <a:rPr b="0" lang="en-US"/>
               <a:t>null</a:t>
             </a:fld>
             <a:endParaRPr lang="en-US"/>
@@ -2035,6 +2228,8 @@
     <p:sldLayoutId id="2147483650" r:id="rId2"/>
     <p:sldLayoutId id="2147483651" r:id="rId3"/>
     <p:sldLayoutId id="2147483652" r:id="rId4"/>
+    <p:sldLayoutId id="2147483653" r:id="rId5"/>
+    <p:sldLayoutId id="2147483654" r:id="rId6"/>
   </p:sldLayoutIdLst>
   <p:hf sldNum="0" hdr="0" ftr="0" dt="0"/>
   <p:txStyles>
@@ -2307,9 +2502,53 @@
           <a:chExt cx="0" cy="0"/>
         </a:xfrm>
       </p:grpSpPr>
-      <p:sp>
-        <p:nvSpPr>
-          <p:cNvPr id="2" name="Text 0"/>
+      <p:pic>
+        <p:nvPicPr>
+          <p:cNvPr id="2" name="Image 0" descr="Illustration: Elektroflugzeug in der Draufsicht, orange, über hellgrauen Reichweitenringen">    </p:cNvPr>
+          <p:cNvPicPr>
+            <a:picLocks noChangeAspect="1"/>
+          </p:cNvPicPr>
+          <p:nvPr/>
+        </p:nvPicPr>
+        <p:blipFill>
+          <a:blip r:embed="rId1"/>
+          <a:stretch>
+            <a:fillRect/>
+          </a:stretch>
+        </p:blipFill>
+        <p:spPr>
+          <a:xfrm>
+            <a:off x="0" y="0"/>
+            <a:ext cx="12192000" cy="6858000"/>
+          </a:xfrm>
+          <a:prstGeom prst="rect">
+            <a:avLst/>
+          </a:prstGeom>
+        </p:spPr>
+      </p:pic>
+      <p:sp>
+        <p:nvSpPr>
+          <p:cNvPr id="3" name="Shape 0"/>
+          <p:cNvSpPr/>
+          <p:nvPr/>
+        </p:nvSpPr>
+        <p:spPr>
+          <a:xfrm>
+            <a:off x="609600" y="2032000"/>
+            <a:ext cx="6096000" cy="2032000"/>
+          </a:xfrm>
+          <a:prstGeom prst="rect">
+            <a:avLst/>
+          </a:prstGeom>
+          <a:solidFill>
+            <a:srgbClr val="FFFFFF"/>
+          </a:solidFill>
+          <a:ln/>
+        </p:spPr>
+      </p:sp>
+      <p:sp>
+        <p:nvSpPr>
+          <p:cNvPr id="4" name="Text 0"/>
           <p:cNvSpPr/>
           <p:nvPr>
             <p:ph idx="100" type="title" hasCustomPrompt="1"/>
@@ -2318,7 +2557,7 @@
         <p:spPr>
           <a:xfrm>
             <a:off x="609600" y="2032000"/>
-            <a:ext cx="9753600" cy="1422400"/>
+            <a:ext cx="6096000" cy="2032000"/>
           </a:xfrm>
           <a:prstGeom prst="rect">
             <a:avLst/>
@@ -2350,19 +2589,21 @@
       </p:sp>
       <p:sp>
         <p:nvSpPr>
-          <p:cNvPr id="3" name="Text 1"/>
+          <p:cNvPr id="5" name="Text 2"/>
           <p:cNvSpPr txBox="1"/>
           <p:nvPr/>
         </p:nvSpPr>
         <p:spPr>
           <a:xfrm>
-            <a:off x="609600" y="3759200"/>
-            <a:ext cx="9753600" cy="406400"/>
+            <a:off x="609600" y="4267200"/>
+            <a:ext cx="6096000" cy="304800"/>
           </a:xfrm>
           <a:prstGeom prst="rect">
             <a:avLst/>
           </a:prstGeom>
-          <a:noFill/>
+          <a:solidFill>
+            <a:srgbClr val="FFFFFF"/>
+          </a:solidFill>
           <a:ln/>
         </p:spPr>
         <p:txBody>
@@ -2384,6 +2625,398 @@
               <a:t>Beispieldaten: alle Zahlen sind erfunden</a:t>
             </a:r>
             <a:endParaRPr lang="en-US" sz="1800" dirty="0"/>
+          </a:p>
+        </p:txBody>
+      </p:sp>
+    </p:spTree>
+  </p:cSld>
+  <p:clrMapOvr>
+    <a:masterClrMapping/>
+  </p:clrMapOvr>
+</p:sld>
+</file>
+
+<file path=ppt/slides/slide2.xml><?xml version="1.0" encoding="utf-8"?>
+<p:sld xmlns:a="http://schemas.openxmlformats.org/drawingml/2006/main" xmlns:r="http://schemas.openxmlformats.org/officeDocument/2006/relationships" xmlns:p="http://schemas.openxmlformats.org/presentationml/2006/main">
+  <p:cSld name="Slide 2">
+    <p:spTree>
+      <p:nvGrpSpPr>
+        <p:cNvPr id="1" name=""/>
+        <p:cNvGrpSpPr/>
+        <p:nvPr/>
+      </p:nvGrpSpPr>
+      <p:grpSpPr>
+        <a:xfrm>
+          <a:off x="0" y="0"/>
+          <a:ext cx="0" cy="0"/>
+          <a:chOff x="0" y="0"/>
+          <a:chExt cx="0" cy="0"/>
+        </a:xfrm>
+      </p:grpSpPr>
+      <p:sp>
+        <p:nvSpPr>
+          <p:cNvPr id="2" name="Text 0"/>
+          <p:cNvSpPr/>
+          <p:nvPr>
+            <p:ph idx="100" type="title" hasCustomPrompt="1"/>
+          </p:nvPr>
+        </p:nvSpPr>
+        <p:spPr>
+          <a:xfrm>
+            <a:off x="609600" y="609600"/>
+            <a:ext cx="10972800" cy="508000"/>
+          </a:xfrm>
+          <a:prstGeom prst="rect">
+            <a:avLst/>
+          </a:prstGeom>
+          <a:noFill/>
+          <a:ln/>
+        </p:spPr>
+        <p:txBody>
+          <a:bodyPr wrap="square" lIns="0" tIns="0" rIns="0" bIns="0" rtlCol="0" anchor="t"/>
+          <a:lstStyle/>
+          <a:p>
+            <a:pPr algn="l" indent="0" marL="0">
+              <a:buNone/>
+            </a:pPr>
+            <a:r>
+              <a:rPr lang="en-US" sz="2800" b="1" dirty="0">
+                <a:solidFill>
+                  <a:srgbClr val="1B2733"/>
+                </a:solidFill>
+                <a:latin typeface="Arial" pitchFamily="34" charset="0"/>
+                <a:ea typeface="Arial" pitchFamily="34" charset="-122"/>
+                <a:cs typeface="Arial" pitchFamily="34" charset="-120"/>
+              </a:rPr>
+              <a:t>14 von 30 Strecken liegen innerhalb von 320 Kilometern</a:t>
+            </a:r>
+            <a:endParaRPr lang="en-US" sz="2800" dirty="0"/>
+          </a:p>
+        </p:txBody>
+      </p:sp>
+      <p:pic>
+        <p:nvPicPr>
+          <p:cNvPr id="3" name="Image 0" descr="Streckenkarte des Beispielnetzes: 30 Strecken vom Drehkreuz, 14 orange innerhalb des Rings von 320 Kilometern, 16 grau außerhalb.">    </p:cNvPr>
+          <p:cNvPicPr>
+            <a:picLocks noChangeAspect="1"/>
+          </p:cNvPicPr>
+          <p:nvPr/>
+        </p:nvPicPr>
+        <p:blipFill>
+          <a:blip r:embed="rId1"/>
+          <a:stretch>
+            <a:fillRect/>
+          </a:stretch>
+        </p:blipFill>
+        <p:spPr>
+          <a:xfrm>
+            <a:off x="609600" y="1524000"/>
+            <a:ext cx="5422900" cy="4064000"/>
+          </a:xfrm>
+          <a:prstGeom prst="rect">
+            <a:avLst/>
+          </a:prstGeom>
+        </p:spPr>
+      </p:pic>
+      <p:sp>
+        <p:nvSpPr>
+          <p:cNvPr id="4" name="Text 1"/>
+          <p:cNvSpPr txBox="1"/>
+          <p:nvPr/>
+        </p:nvSpPr>
+        <p:spPr>
+          <a:xfrm>
+            <a:off x="6705600" y="1625600"/>
+            <a:ext cx="4876800" cy="1828800"/>
+          </a:xfrm>
+          <a:prstGeom prst="rect">
+            <a:avLst/>
+          </a:prstGeom>
+          <a:noFill/>
+          <a:ln/>
+        </p:spPr>
+        <p:txBody>
+          <a:bodyPr wrap="square" lIns="0" tIns="0" rIns="0" bIns="0" rtlCol="0" anchor="t"/>
+          <a:lstStyle/>
+          <a:p>
+            <a:pPr algn="l" indent="0" marL="0">
+              <a:spcAft>
+                <a:spcPts val="1600"/>
+              </a:spcAft>
+              <a:buNone/>
+            </a:pPr>
+            <a:r>
+              <a:rPr lang="en-US" sz="1800" dirty="0">
+                <a:solidFill>
+                  <a:srgbClr val="1B2733"/>
+                </a:solidFill>
+                <a:latin typeface="Arial" pitchFamily="34" charset="0"/>
+                <a:ea typeface="Arial" pitchFamily="34" charset="-122"/>
+                <a:cs typeface="Arial" pitchFamily="34" charset="-120"/>
+              </a:rPr>
+              <a:t>14 Strecken (47 %) sind elektrisch erreichbar.</a:t>
+            </a:r>
+            <a:endParaRPr lang="en-US" sz="1800" dirty="0"/>
+          </a:p>
+          <a:p>
+            <a:pPr algn="l" indent="0" marL="0">
+              <a:spcAft>
+                <a:spcPts val="1600"/>
+              </a:spcAft>
+              <a:buNone/>
+            </a:pPr>
+            <a:r>
+              <a:rPr lang="en-US" sz="1800" dirty="0">
+                <a:solidFill>
+                  <a:srgbClr val="1B2733"/>
+                </a:solidFill>
+                <a:latin typeface="Arial" pitchFamily="34" charset="0"/>
+                <a:ea typeface="Arial" pitchFamily="34" charset="-122"/>
+                <a:cs typeface="Arial" pitchFamily="34" charset="-120"/>
+              </a:rPr>
+              <a:t>Sie tragen 38 % der Passagiere.</a:t>
+            </a:r>
+            <a:endParaRPr lang="en-US" sz="1800" dirty="0"/>
+          </a:p>
+          <a:p>
+            <a:pPr algn="l" indent="0" marL="0">
+              <a:spcAft>
+                <a:spcPts val="1600"/>
+              </a:spcAft>
+              <a:buNone/>
+            </a:pPr>
+            <a:r>
+              <a:rPr lang="en-US" sz="1800" dirty="0">
+                <a:solidFill>
+                  <a:srgbClr val="1B2733"/>
+                </a:solidFill>
+                <a:latin typeface="Arial" pitchFamily="34" charset="0"/>
+                <a:ea typeface="Arial" pitchFamily="34" charset="-122"/>
+                <a:cs typeface="Arial" pitchFamily="34" charset="-120"/>
+              </a:rPr>
+              <a:t>Die übrigen 16 bleiben beim Turboprop.</a:t>
+            </a:r>
+            <a:endParaRPr lang="en-US" sz="1800" dirty="0"/>
+          </a:p>
+        </p:txBody>
+      </p:sp>
+      <p:sp>
+        <p:nvSpPr>
+          <p:cNvPr id="5" name="Shape 2"/>
+          <p:cNvSpPr/>
+          <p:nvPr/>
+        </p:nvSpPr>
+        <p:spPr>
+          <a:xfrm>
+            <a:off x="6705600" y="4508500"/>
+            <a:ext cx="177800" cy="177800"/>
+          </a:xfrm>
+          <a:prstGeom prst="ellipse">
+            <a:avLst/>
+          </a:prstGeom>
+          <a:solidFill>
+            <a:srgbClr val="C2410C"/>
+          </a:solidFill>
+          <a:ln/>
+        </p:spPr>
+      </p:sp>
+      <p:sp>
+        <p:nvSpPr>
+          <p:cNvPr id="6" name="Text 3"/>
+          <p:cNvSpPr txBox="1"/>
+          <p:nvPr/>
+        </p:nvSpPr>
+        <p:spPr>
+          <a:xfrm>
+            <a:off x="7112000" y="4470400"/>
+            <a:ext cx="4470400" cy="254000"/>
+          </a:xfrm>
+          <a:prstGeom prst="rect">
+            <a:avLst/>
+          </a:prstGeom>
+          <a:noFill/>
+          <a:ln/>
+        </p:spPr>
+        <p:txBody>
+          <a:bodyPr wrap="square" lIns="0" tIns="0" rIns="0" bIns="0" rtlCol="0" anchor="t"/>
+          <a:lstStyle/>
+          <a:p>
+            <a:pPr algn="l" indent="0" marL="0">
+              <a:buNone/>
+            </a:pPr>
+            <a:r>
+              <a:rPr lang="en-US" sz="1400" dirty="0">
+                <a:solidFill>
+                  <a:srgbClr val="1B2733"/>
+                </a:solidFill>
+                <a:latin typeface="Arial" pitchFamily="34" charset="0"/>
+                <a:ea typeface="Arial" pitchFamily="34" charset="-122"/>
+                <a:cs typeface="Arial" pitchFamily="34" charset="-120"/>
+              </a:rPr>
+              <a:t>Strecke innerhalb von 320 km</a:t>
+            </a:r>
+            <a:endParaRPr lang="en-US" sz="1400" dirty="0"/>
+          </a:p>
+        </p:txBody>
+      </p:sp>
+      <p:sp>
+        <p:nvSpPr>
+          <p:cNvPr id="7" name="Shape 4"/>
+          <p:cNvSpPr/>
+          <p:nvPr/>
+        </p:nvSpPr>
+        <p:spPr>
+          <a:xfrm>
+            <a:off x="6705600" y="4914900"/>
+            <a:ext cx="177800" cy="177800"/>
+          </a:xfrm>
+          <a:prstGeom prst="ellipse">
+            <a:avLst/>
+          </a:prstGeom>
+          <a:ln w="19050">
+            <a:solidFill>
+              <a:srgbClr val="7B8794"/>
+            </a:solidFill>
+            <a:prstDash val="solid"/>
+          </a:ln>
+        </p:spPr>
+      </p:sp>
+      <p:sp>
+        <p:nvSpPr>
+          <p:cNvPr id="8" name="Text 5"/>
+          <p:cNvSpPr txBox="1"/>
+          <p:nvPr/>
+        </p:nvSpPr>
+        <p:spPr>
+          <a:xfrm>
+            <a:off x="7112000" y="4876800"/>
+            <a:ext cx="4470400" cy="254000"/>
+          </a:xfrm>
+          <a:prstGeom prst="rect">
+            <a:avLst/>
+          </a:prstGeom>
+          <a:noFill/>
+          <a:ln/>
+        </p:spPr>
+        <p:txBody>
+          <a:bodyPr wrap="square" lIns="0" tIns="0" rIns="0" bIns="0" rtlCol="0" anchor="t"/>
+          <a:lstStyle/>
+          <a:p>
+            <a:pPr algn="l" indent="0" marL="0">
+              <a:buNone/>
+            </a:pPr>
+            <a:r>
+              <a:rPr lang="en-US" sz="1400" dirty="0">
+                <a:solidFill>
+                  <a:srgbClr val="1B2733"/>
+                </a:solidFill>
+                <a:latin typeface="Arial" pitchFamily="34" charset="0"/>
+                <a:ea typeface="Arial" pitchFamily="34" charset="-122"/>
+                <a:cs typeface="Arial" pitchFamily="34" charset="-120"/>
+              </a:rPr>
+              <a:t>Strecke darüber</a:t>
+            </a:r>
+            <a:endParaRPr lang="en-US" sz="1400" dirty="0"/>
+          </a:p>
+        </p:txBody>
+      </p:sp>
+      <p:sp>
+        <p:nvSpPr>
+          <p:cNvPr id="9" name="Shape 6"/>
+          <p:cNvSpPr/>
+          <p:nvPr/>
+        </p:nvSpPr>
+        <p:spPr>
+          <a:xfrm>
+            <a:off x="6705600" y="5321300"/>
+            <a:ext cx="177800" cy="177800"/>
+          </a:xfrm>
+          <a:prstGeom prst="ellipse">
+            <a:avLst/>
+          </a:prstGeom>
+          <a:ln w="19050">
+            <a:solidFill>
+              <a:srgbClr val="C2410C"/>
+            </a:solidFill>
+            <a:prstDash val="solid"/>
+          </a:ln>
+        </p:spPr>
+      </p:sp>
+      <p:sp>
+        <p:nvSpPr>
+          <p:cNvPr id="10" name="Text 7"/>
+          <p:cNvSpPr txBox="1"/>
+          <p:nvPr/>
+        </p:nvSpPr>
+        <p:spPr>
+          <a:xfrm>
+            <a:off x="7112000" y="5283200"/>
+            <a:ext cx="4470400" cy="254000"/>
+          </a:xfrm>
+          <a:prstGeom prst="rect">
+            <a:avLst/>
+          </a:prstGeom>
+          <a:noFill/>
+          <a:ln/>
+        </p:spPr>
+        <p:txBody>
+          <a:bodyPr wrap="square" lIns="0" tIns="0" rIns="0" bIns="0" rtlCol="0" anchor="t"/>
+          <a:lstStyle/>
+          <a:p>
+            <a:pPr algn="l" indent="0" marL="0">
+              <a:buNone/>
+            </a:pPr>
+            <a:r>
+              <a:rPr lang="en-US" sz="1400" dirty="0">
+                <a:solidFill>
+                  <a:srgbClr val="1B2733"/>
+                </a:solidFill>
+                <a:latin typeface="Arial" pitchFamily="34" charset="0"/>
+                <a:ea typeface="Arial" pitchFamily="34" charset="-122"/>
+                <a:cs typeface="Arial" pitchFamily="34" charset="-120"/>
+              </a:rPr>
+              <a:t>Ring: 320 km Reichweite</a:t>
+            </a:r>
+            <a:endParaRPr lang="en-US" sz="1400" dirty="0"/>
+          </a:p>
+        </p:txBody>
+      </p:sp>
+      <p:sp>
+        <p:nvSpPr>
+          <p:cNvPr id="11" name="Text 8"/>
+          <p:cNvSpPr txBox="1"/>
+          <p:nvPr/>
+        </p:nvSpPr>
+        <p:spPr>
+          <a:xfrm>
+            <a:off x="609600" y="5791200"/>
+            <a:ext cx="9753600" cy="304800"/>
+          </a:xfrm>
+          <a:prstGeom prst="rect">
+            <a:avLst/>
+          </a:prstGeom>
+          <a:noFill/>
+          <a:ln/>
+        </p:spPr>
+        <p:txBody>
+          <a:bodyPr wrap="square" lIns="0" tIns="0" rIns="0" bIns="0" rtlCol="0" anchor="t"/>
+          <a:lstStyle/>
+          <a:p>
+            <a:pPr algn="l" indent="0" marL="0">
+              <a:buNone/>
+            </a:pPr>
+            <a:r>
+              <a:rPr lang="en-US" sz="1000" dirty="0">
+                <a:solidFill>
+                  <a:srgbClr val="4A5866"/>
+                </a:solidFill>
+                <a:latin typeface="Arial" pitchFamily="34" charset="0"/>
+                <a:ea typeface="Arial" pitchFamily="34" charset="-122"/>
+                <a:cs typeface="Arial" pitchFamily="34" charset="-120"/>
+              </a:rPr>
+              <a:t>Quelle: Streckennetz der Beispielairline, Stand 2026 (erfundene Daten)</a:t>
+            </a:r>
+            <a:endParaRPr lang="en-US" sz="1000" dirty="0"/>
           </a:p>
         </p:txBody>
       </p:sp>
@@ -2429,257 +3062,6 @@
             <a:pPr algn="r"/>
             <a:fld id="{F7021451-1387-4CA6-816F-3879F97B5CBC}" type="slidenum">
               <a:rPr b="0" lang="en-US"/>
-              <a:t>1</a:t>
-            </a:fld>
-            <a:endParaRPr lang="en-US"/>
-          </a:p>
-        </p:txBody>
-      </p:sp>
-    </p:spTree>
-  </p:cSld>
-  <p:clrMapOvr>
-    <a:masterClrMapping/>
-  </p:clrMapOvr>
-</p:sld>
-</file>
-
-<file path=ppt/slides/slide2.xml><?xml version="1.0" encoding="utf-8"?>
-<p:sld xmlns:a="http://schemas.openxmlformats.org/drawingml/2006/main" xmlns:r="http://schemas.openxmlformats.org/officeDocument/2006/relationships" xmlns:p="http://schemas.openxmlformats.org/presentationml/2006/main">
-  <p:cSld name="Slide 2">
-    <p:spTree>
-      <p:nvGrpSpPr>
-        <p:cNvPr id="1" name=""/>
-        <p:cNvGrpSpPr/>
-        <p:nvPr/>
-      </p:nvGrpSpPr>
-      <p:grpSpPr>
-        <a:xfrm>
-          <a:off x="0" y="0"/>
-          <a:ext cx="0" cy="0"/>
-          <a:chOff x="0" y="0"/>
-          <a:chExt cx="0" cy="0"/>
-        </a:xfrm>
-      </p:grpSpPr>
-      <p:sp>
-        <p:nvSpPr>
-          <p:cNvPr id="2" name="Text 0"/>
-          <p:cNvSpPr/>
-          <p:nvPr>
-            <p:ph idx="100" type="title" hasCustomPrompt="1"/>
-          </p:nvPr>
-        </p:nvSpPr>
-        <p:spPr>
-          <a:xfrm>
-            <a:off x="609600" y="609600"/>
-            <a:ext cx="10972800" cy="1016000"/>
-          </a:xfrm>
-          <a:prstGeom prst="rect">
-            <a:avLst/>
-          </a:prstGeom>
-          <a:noFill/>
-          <a:ln/>
-        </p:spPr>
-        <p:txBody>
-          <a:bodyPr wrap="square" lIns="0" tIns="0" rIns="0" bIns="0" rtlCol="0" anchor="t"/>
-          <a:lstStyle/>
-          <a:p>
-            <a:pPr algn="l" indent="0" marL="0">
-              <a:buNone/>
-            </a:pPr>
-            <a:r>
-              <a:rPr lang="en-US" sz="2800" b="1" dirty="0">
-                <a:solidFill>
-                  <a:srgbClr val="1B2733"/>
-                </a:solidFill>
-                <a:latin typeface="Arial" pitchFamily="34" charset="0"/>
-                <a:ea typeface="Arial" pitchFamily="34" charset="-122"/>
-                <a:cs typeface="Arial" pitchFamily="34" charset="-120"/>
-              </a:rPr>
-              <a:t>14 von 30 Strecken liegen innerhalb von 320 Kilometern</a:t>
-            </a:r>
-            <a:endParaRPr lang="en-US" sz="2800" dirty="0"/>
-          </a:p>
-        </p:txBody>
-      </p:sp>
-      <p:graphicFrame>
-        <p:nvGraphicFramePr>
-          <p:cNvPr id="3" name="Chart 0" descr="Anzahl der Strecken nach Entfernung: 5 bis 150 km, 9 bis 320 km, 8 bis 500 km, 8 darüber. Die ersten zwei Klassen sind hervorgehoben."/>
-          <p:cNvGraphicFramePr/>
-          <p:nvPr/>
-        </p:nvGraphicFramePr>
-        <p:xfrm>
-          <a:off x="609600" y="1828800"/>
-          <a:ext cx="6705600" cy="3759200"/>
-        </p:xfrm>
-        <a:graphic xmlns:a="http://schemas.openxmlformats.org/drawingml/2006/main">
-          <a:graphicData uri="http://schemas.openxmlformats.org/drawingml/2006/chart">
-            <c:chart xmlns:c="http://schemas.openxmlformats.org/drawingml/2006/chart" r:id="rId1"/>
-          </a:graphicData>
-        </a:graphic>
-      </p:graphicFrame>
-      <p:sp>
-        <p:nvSpPr>
-          <p:cNvPr id="4" name="Text 1"/>
-          <p:cNvSpPr txBox="1"/>
-          <p:nvPr/>
-        </p:nvSpPr>
-        <p:spPr>
-          <a:xfrm>
-            <a:off x="7924800" y="2032000"/>
-            <a:ext cx="3657600" cy="1828800"/>
-          </a:xfrm>
-          <a:prstGeom prst="rect">
-            <a:avLst/>
-          </a:prstGeom>
-          <a:noFill/>
-          <a:ln/>
-        </p:spPr>
-        <p:txBody>
-          <a:bodyPr wrap="square" lIns="0" tIns="0" rIns="0" bIns="0" rtlCol="0" anchor="t"/>
-          <a:lstStyle/>
-          <a:p>
-            <a:pPr algn="l" indent="0" marL="0">
-              <a:spcAft>
-                <a:spcPts val="1600"/>
-              </a:spcAft>
-              <a:buNone/>
-            </a:pPr>
-            <a:r>
-              <a:rPr lang="en-US" sz="1800" dirty="0">
-                <a:solidFill>
-                  <a:srgbClr val="1B2733"/>
-                </a:solidFill>
-                <a:latin typeface="Arial" pitchFamily="34" charset="0"/>
-                <a:ea typeface="Arial" pitchFamily="34" charset="-122"/>
-                <a:cs typeface="Arial" pitchFamily="34" charset="-120"/>
-              </a:rPr>
-              <a:t>14 Strecken (47 %) sind elektrisch erreichbar.</a:t>
-            </a:r>
-            <a:endParaRPr lang="en-US" sz="1800" dirty="0"/>
-          </a:p>
-          <a:p>
-            <a:pPr algn="l" indent="0" marL="0">
-              <a:spcAft>
-                <a:spcPts val="1600"/>
-              </a:spcAft>
-              <a:buNone/>
-            </a:pPr>
-            <a:r>
-              <a:rPr lang="en-US" sz="1800" dirty="0">
-                <a:solidFill>
-                  <a:srgbClr val="1B2733"/>
-                </a:solidFill>
-                <a:latin typeface="Arial" pitchFamily="34" charset="0"/>
-                <a:ea typeface="Arial" pitchFamily="34" charset="-122"/>
-                <a:cs typeface="Arial" pitchFamily="34" charset="-120"/>
-              </a:rPr>
-              <a:t>Sie tragen 38 % der Passagiere.</a:t>
-            </a:r>
-            <a:endParaRPr lang="en-US" sz="1800" dirty="0"/>
-          </a:p>
-          <a:p>
-            <a:pPr algn="l" indent="0" marL="0">
-              <a:spcAft>
-                <a:spcPts val="1600"/>
-              </a:spcAft>
-              <a:buNone/>
-            </a:pPr>
-            <a:r>
-              <a:rPr lang="en-US" sz="1800" dirty="0">
-                <a:solidFill>
-                  <a:srgbClr val="1B2733"/>
-                </a:solidFill>
-                <a:latin typeface="Arial" pitchFamily="34" charset="0"/>
-                <a:ea typeface="Arial" pitchFamily="34" charset="-122"/>
-                <a:cs typeface="Arial" pitchFamily="34" charset="-120"/>
-              </a:rPr>
-              <a:t>Die übrigen 16 bleiben beim Turboprop.</a:t>
-            </a:r>
-            <a:endParaRPr lang="en-US" sz="1800" dirty="0"/>
-          </a:p>
-        </p:txBody>
-      </p:sp>
-      <p:sp>
-        <p:nvSpPr>
-          <p:cNvPr id="5" name="Text 2"/>
-          <p:cNvSpPr txBox="1"/>
-          <p:nvPr/>
-        </p:nvSpPr>
-        <p:spPr>
-          <a:xfrm>
-            <a:off x="609600" y="5791200"/>
-            <a:ext cx="9753600" cy="304800"/>
-          </a:xfrm>
-          <a:prstGeom prst="rect">
-            <a:avLst/>
-          </a:prstGeom>
-          <a:noFill/>
-          <a:ln/>
-        </p:spPr>
-        <p:txBody>
-          <a:bodyPr wrap="square" lIns="0" tIns="0" rIns="0" bIns="0" rtlCol="0" anchor="t"/>
-          <a:lstStyle/>
-          <a:p>
-            <a:pPr algn="l" indent="0" marL="0">
-              <a:buNone/>
-            </a:pPr>
-            <a:r>
-              <a:rPr lang="en-US" sz="1000" dirty="0">
-                <a:solidFill>
-                  <a:srgbClr val="4A5866"/>
-                </a:solidFill>
-                <a:latin typeface="Arial" pitchFamily="34" charset="0"/>
-                <a:ea typeface="Arial" pitchFamily="34" charset="-122"/>
-                <a:cs typeface="Arial" pitchFamily="34" charset="-120"/>
-              </a:rPr>
-              <a:t>Quelle: Streckennetz der Beispielairline, Stand 2026 (erfundene Daten)</a:t>
-            </a:r>
-            <a:endParaRPr lang="en-US" sz="1000" dirty="0"/>
-          </a:p>
-        </p:txBody>
-      </p:sp>
-      <p:sp>
-        <p:nvSpPr>
-          <p:cNvPr id="25" name="Slide Number Placeholder 0"/>
-          <p:cNvSpPr>
-            <a:spLocks noGrp="1"/>
-          </p:cNvSpPr>
-          <p:nvPr>
-            <p:ph type="sldNum" sz="quarter" idx="4294967295"/>
-          </p:nvPr>
-        </p:nvSpPr>
-        <p:spPr>
-          <a:xfrm>
-            <a:off x="10972800" y="5791200"/>
-            <a:ext cx="609600" cy="304800"/>
-          </a:xfrm>
-          <a:prstGeom prst="rect">
-            <a:avLst/>
-          </a:prstGeom>
-          <a:extLst>
-            <a:ext uri="{C572A759-6A51-4108-AA02-DFA0A04FC94B}">
-              <ma14:wrappingTextBoxFlag xmlns:ma14="http://schemas.microsoft.com/office/mac/drawingml/2011/main" val="0"/>
-            </a:ext>
-          </a:extLst>
-        </p:spPr>
-        <p:txBody>
-          <a:bodyPr/>
-          <a:lstStyle>
-            <a:lvl1pPr>
-              <a:defRPr sz="1000">
-                <a:solidFill>
-                  <a:srgbClr val="4A5866"/>
-                </a:solidFill>
-                <a:latin typeface="Arial"/>
-                <a:ea typeface="Arial"/>
-                <a:cs typeface="Arial"/>
-              </a:defRPr>
-            </a:lvl1pPr>
-          </a:lstStyle>
-          <a:p>
-            <a:pPr algn="r"/>
-            <a:fld id="{F7021451-1387-4CA6-816F-3879F97B5CBC}" type="slidenum">
-              <a:rPr b="0" lang="en-US"/>
               <a:t>2</a:t>
             </a:fld>
             <a:endParaRPr lang="en-US"/>
@@ -2722,7 +3104,7 @@
         <p:spPr>
           <a:xfrm>
             <a:off x="609600" y="609600"/>
-            <a:ext cx="10972800" cy="1016000"/>
+            <a:ext cx="10972800" cy="508000"/>
           </a:xfrm>
           <a:prstGeom prst="rect">
             <a:avLst/>
@@ -2746,7 +3128,7 @@
                 <a:ea typeface="Arial" pitchFamily="34" charset="-122"/>
                 <a:cs typeface="Arial" pitchFamily="34" charset="-120"/>
               </a:rPr>
-              <a:t>Der Sitzkilometer wird mit dem E-Flugzeug 22 % günstiger</a:t>
+              <a:t>Mit E-Flugzeug wird der Sitzkilometer 22 % günstiger</a:t>
             </a:r>
             <a:endParaRPr lang="en-US" sz="2800" dirty="0"/>
           </a:p>
@@ -2767,15 +3149,15 @@
           </p:nvPr>
         </p:nvGraphicFramePr>
         <p:xfrm>
-          <a:off x="609600" y="1828800"/>
-          <a:ext cx="6705600" cy="914400"/>
+          <a:off x="609600" y="1524000"/>
+          <a:ext cx="5486400" cy="914400"/>
         </p:xfrm>
         <a:graphic>
           <a:graphicData uri="http://schemas.openxmlformats.org/drawingml/2006/table">
             <a:tbl>
               <a:tblPr/>
               <a:tblGrid>
-                <a:gridCol w="3657600"/>
+                <a:gridCol w="2438400"/>
                 <a:gridCol w="1524000"/>
                 <a:gridCol w="1524000"/>
               </a:tblGrid>
@@ -3641,16 +4023,32 @@
           </a:graphicData>
         </a:graphic>
       </p:graphicFrame>
-      <p:sp>
-        <p:nvSpPr>
-          <p:cNvPr id="4" name="Text 1"/>
+      <p:graphicFrame>
+        <p:nvGraphicFramePr>
+          <p:cNvPr id="4" name="Chart 0" descr="Kosten je Sitzkilometer in Cent: Turboprop 14,2, E-Flugzeug 11,1."/>
+          <p:cNvGraphicFramePr/>
+          <p:nvPr/>
+        </p:nvGraphicFramePr>
+        <p:xfrm>
+          <a:off x="6705600" y="1524000"/>
+          <a:ext cx="4876800" cy="2032000"/>
+        </p:xfrm>
+        <a:graphic xmlns:a="http://schemas.openxmlformats.org/drawingml/2006/main">
+          <a:graphicData uri="http://schemas.openxmlformats.org/drawingml/2006/chart">
+            <c:chart xmlns:c="http://schemas.openxmlformats.org/drawingml/2006/chart" r:id="rId1"/>
+          </a:graphicData>
+        </a:graphic>
+      </p:graphicFrame>
+      <p:sp>
+        <p:nvSpPr>
+          <p:cNvPr id="5" name="Text 1"/>
           <p:cNvSpPr txBox="1"/>
           <p:nvPr/>
         </p:nvSpPr>
         <p:spPr>
           <a:xfrm>
-            <a:off x="7924800" y="2032000"/>
-            <a:ext cx="3657600" cy="1016000"/>
+            <a:off x="6705600" y="3860800"/>
+            <a:ext cx="4876800" cy="914400"/>
           </a:xfrm>
           <a:prstGeom prst="rect">
             <a:avLst/>
@@ -3685,7 +4083,7 @@
       </p:sp>
       <p:sp>
         <p:nvSpPr>
-          <p:cNvPr id="5" name="Text 2"/>
+          <p:cNvPr id="6" name="Text 2"/>
           <p:cNvSpPr txBox="1"/>
           <p:nvPr/>
         </p:nvSpPr>
@@ -3806,7 +4204,7 @@
         <p:spPr>
           <a:xfrm>
             <a:off x="609600" y="609600"/>
-            <a:ext cx="10972800" cy="1016000"/>
+            <a:ext cx="10972800" cy="508000"/>
           </a:xfrm>
           <a:prstGeom prst="rect">
             <a:avLst/>
@@ -3830,7 +4228,7 @@
                 <a:ea typeface="Arial" pitchFamily="34" charset="-122"/>
                 <a:cs typeface="Arial" pitchFamily="34" charset="-120"/>
               </a:rPr>
-              <a:t>Die Reichweite von 320 Kilometern bleibt die harte Grenze</a:t>
+              <a:t>320 Kilometer Reichweite bleiben die harte Grenze</a:t>
             </a:r>
             <a:endParaRPr lang="en-US" sz="2800" dirty="0"/>
           </a:p>
@@ -3851,15 +4249,15 @@
           </p:nvPr>
         </p:nvGraphicFramePr>
         <p:xfrm>
-          <a:off x="609600" y="1828800"/>
-          <a:ext cx="6705600" cy="914400"/>
+          <a:off x="609600" y="1524000"/>
+          <a:ext cx="5791200" cy="914400"/>
         </p:xfrm>
         <a:graphic>
           <a:graphicData uri="http://schemas.openxmlformats.org/drawingml/2006/table">
             <a:tbl>
               <a:tblPr/>
               <a:tblGrid>
-                <a:gridCol w="3657600"/>
+                <a:gridCol w="2743200"/>
                 <a:gridCol w="1524000"/>
                 <a:gridCol w="1524000"/>
               </a:tblGrid>
@@ -4582,16 +4980,40 @@
           </a:graphicData>
         </a:graphic>
       </p:graphicFrame>
-      <p:sp>
-        <p:nvSpPr>
-          <p:cNvPr id="4" name="Text 1"/>
+      <p:pic>
+        <p:nvPicPr>
+          <p:cNvPr id="4" name="Image 0" descr="Technische Zeichnung des E-Flugzeugs Modell EV-19 in der Draufsicht mit vier Propellern und einer Maßlinie unter der Spannweite.">    </p:cNvPr>
+          <p:cNvPicPr>
+            <a:picLocks noChangeAspect="1"/>
+          </p:cNvPicPr>
+          <p:nvPr/>
+        </p:nvPicPr>
+        <p:blipFill>
+          <a:blip r:embed="rId1"/>
+          <a:stretch>
+            <a:fillRect/>
+          </a:stretch>
+        </p:blipFill>
+        <p:spPr>
+          <a:xfrm>
+            <a:off x="7340600" y="1320800"/>
+            <a:ext cx="4089400" cy="4267200"/>
+          </a:xfrm>
+          <a:prstGeom prst="rect">
+            <a:avLst/>
+          </a:prstGeom>
+        </p:spPr>
+      </p:pic>
+      <p:sp>
+        <p:nvSpPr>
+          <p:cNvPr id="5" name="Text 1"/>
           <p:cNvSpPr txBox="1"/>
           <p:nvPr/>
         </p:nvSpPr>
         <p:spPr>
           <a:xfrm>
-            <a:off x="7924800" y="2032000"/>
-            <a:ext cx="3657600" cy="1219200"/>
+            <a:off x="609600" y="4368800"/>
+            <a:ext cx="5791200" cy="1219200"/>
           </a:xfrm>
           <a:prstGeom prst="rect">
             <a:avLst/>
@@ -4646,7 +5068,7 @@
       </p:sp>
       <p:sp>
         <p:nvSpPr>
-          <p:cNvPr id="5" name="Text 2"/>
+          <p:cNvPr id="6" name="Text 2"/>
           <p:cNvSpPr txBox="1"/>
           <p:nvPr/>
         </p:nvSpPr>
@@ -4767,7 +5189,7 @@
         <p:spPr>
           <a:xfrm>
             <a:off x="609600" y="609600"/>
-            <a:ext cx="10972800" cy="1016000"/>
+            <a:ext cx="10972800" cy="508000"/>
           </a:xfrm>
           <a:prstGeom prst="rect">
             <a:avLst/>
@@ -4791,7 +5213,7 @@
                 <a:ea typeface="Arial" pitchFamily="34" charset="-122"/>
                 <a:cs typeface="Arial" pitchFamily="34" charset="-120"/>
               </a:rPr>
-              <a:t>Bis 2033 amortisieren sich 14 Flugzeuge bei 137 Mio. € Investition</a:t>
+              <a:t>Die 137 Mio. € Investition amortisieren sich bis 2033</a:t>
             </a:r>
             <a:endParaRPr lang="en-US" sz="2800" dirty="0"/>
           </a:p>
@@ -4804,8 +5226,8 @@
           <p:nvPr/>
         </p:nvGraphicFramePr>
         <p:xfrm>
-          <a:off x="609600" y="1828800"/>
-          <a:ext cx="6705600" cy="3759200"/>
+          <a:off x="609600" y="1524000"/>
+          <a:ext cx="7924800" cy="4064000"/>
         </p:xfrm>
         <a:graphic xmlns:a="http://schemas.openxmlformats.org/drawingml/2006/main">
           <a:graphicData uri="http://schemas.openxmlformats.org/drawingml/2006/chart">
@@ -4821,8 +5243,8 @@
         </p:nvSpPr>
         <p:spPr>
           <a:xfrm>
-            <a:off x="7924800" y="2032000"/>
-            <a:ext cx="3657600" cy="1524000"/>
+            <a:off x="9144000" y="1625600"/>
+            <a:ext cx="2438400" cy="2235200"/>
           </a:xfrm>
           <a:prstGeom prst="rect">
             <a:avLst/>
@@ -5018,7 +5440,7 @@
         <p:spPr>
           <a:xfrm>
             <a:off x="609600" y="609600"/>
-            <a:ext cx="10972800" cy="1016000"/>
+            <a:ext cx="10972800" cy="508000"/>
           </a:xfrm>
           <a:prstGeom prst="rect">
             <a:avLst/>
@@ -5042,768 +5464,65 @@
                 <a:ea typeface="Arial" pitchFamily="34" charset="-122"/>
                 <a:cs typeface="Arial" pitchFamily="34" charset="-120"/>
               </a:rPr>
-              <a:t>Wir empfehlen einen Pilotbetrieb mit vier Flugzeugen ab 2028</a:t>
+              <a:t>Wir empfehlen einen Pilotbetrieb mit vier Flugzeugen</a:t>
             </a:r>
             <a:endParaRPr lang="en-US" sz="2800" dirty="0"/>
           </a:p>
         </p:txBody>
       </p:sp>
-      <p:graphicFrame>
-        <p:nvGraphicFramePr>
-          <p:cNvPr id="7" name="Table 0"/>
-          <p:cNvGraphicFramePr>
-            <a:graphicFrameLocks noGrp="1"/>
-          </p:cNvGraphicFramePr>
-          <p:nvPr>
-            <p:extLst>
-              <p:ext uri="{D42A27DB-BD31-4B8C-83A1-F6EECF244321}">
-                <p14:modId xmlns:p14="http://schemas.microsoft.com/office/powerpoint/2010/main" val="1579011935"/>
-              </p:ext>
-            </p:extLst>
-          </p:nvPr>
-        </p:nvGraphicFramePr>
-        <p:xfrm>
-          <a:off x="609600" y="1828800"/>
-          <a:ext cx="10972800" cy="914400"/>
-        </p:xfrm>
-        <a:graphic>
-          <a:graphicData uri="http://schemas.openxmlformats.org/drawingml/2006/table">
-            <a:tbl>
-              <a:tblPr/>
-              <a:tblGrid>
-                <a:gridCol w="6400800"/>
-                <a:gridCol w="2286000"/>
-                <a:gridCol w="2286000"/>
-              </a:tblGrid>
-              <a:tr h="508000">
-                <a:tc>
-                  <a:txBody>
-                    <a:bodyPr/>
-                    <a:lstStyle/>
-                    <a:p>
-                      <a:pPr algn="l" indent="0" marL="0">
-                        <a:buNone/>
-                      </a:pPr>
-                      <a:r>
-                        <a:rPr lang="en-US" sz="1400" b="1" dirty="0">
-                          <a:solidFill>
-                            <a:srgbClr val="1B2733"/>
-                          </a:solidFill>
-                          <a:latin typeface="Arial" pitchFamily="34" charset="0"/>
-                          <a:ea typeface="Arial" pitchFamily="34" charset="-122"/>
-                          <a:cs typeface="Arial" pitchFamily="34" charset="-120"/>
-                        </a:rPr>
-                        <a:t>Schritt</a:t>
-                      </a:r>
-                      <a:endParaRPr lang="en-US" sz="1400" dirty="0">
-                        <a:latin typeface="Arial" charset="0"/>
-                        <a:ea typeface="Arial" charset="0"/>
-                        <a:cs typeface="Arial" charset="0"/>
-                      </a:endParaRPr>
-                    </a:p>
-                  </a:txBody>
-                  <a:tcPr marL="0" marR="100584" marT="0" marB="0" anchor="ctr">
-                    <a:lnL w="0" cap="flat" cmpd="sng" algn="ctr">
-                      <a:noFill/>
-                    </a:lnL>
-                    <a:lnR w="0" cap="flat" cmpd="sng" algn="ctr">
-                      <a:noFill/>
-                    </a:lnR>
-                    <a:lnT w="0" cap="flat" cmpd="sng" algn="ctr">
-                      <a:noFill/>
-                    </a:lnT>
-                    <a:lnB w="12700" cap="flat" cmpd="sng" algn="ctr">
-                      <a:solidFill>
-                        <a:srgbClr val="1B2733"/>
-                      </a:solidFill>
-                      <a:prstDash val="solid"/>
-                      <a:round/>
-                      <a:headEnd type="none" w="med" len="med"/>
-                      <a:tailEnd type="none" w="med" len="med"/>
-                    </a:lnB>
-                  </a:tcPr>
-                </a:tc>
-                <a:tc>
-                  <a:txBody>
-                    <a:bodyPr/>
-                    <a:lstStyle/>
-                    <a:p>
-                      <a:pPr algn="r" indent="0" marL="0">
-                        <a:buNone/>
-                      </a:pPr>
-                      <a:r>
-                        <a:rPr lang="en-US" sz="1400" b="1" dirty="0">
-                          <a:solidFill>
-                            <a:srgbClr val="1B2733"/>
-                          </a:solidFill>
-                          <a:latin typeface="Arial" pitchFamily="34" charset="0"/>
-                          <a:ea typeface="Arial" pitchFamily="34" charset="-122"/>
-                          <a:cs typeface="Arial" pitchFamily="34" charset="-120"/>
-                        </a:rPr>
-                        <a:t>Zeitpunkt</a:t>
-                      </a:r>
-                      <a:endParaRPr lang="en-US" sz="1400" dirty="0">
-                        <a:latin typeface="Arial" charset="0"/>
-                        <a:ea typeface="Arial" charset="0"/>
-                        <a:cs typeface="Arial" charset="0"/>
-                      </a:endParaRPr>
-                    </a:p>
-                  </a:txBody>
-                  <a:tcPr marL="0" marR="100584" marT="0" marB="0" anchor="ctr">
-                    <a:lnL w="0" cap="flat" cmpd="sng" algn="ctr">
-                      <a:noFill/>
-                    </a:lnL>
-                    <a:lnR w="0" cap="flat" cmpd="sng" algn="ctr">
-                      <a:noFill/>
-                    </a:lnR>
-                    <a:lnT w="0" cap="flat" cmpd="sng" algn="ctr">
-                      <a:noFill/>
-                    </a:lnT>
-                    <a:lnB w="12700" cap="flat" cmpd="sng" algn="ctr">
-                      <a:solidFill>
-                        <a:srgbClr val="1B2733"/>
-                      </a:solidFill>
-                      <a:prstDash val="solid"/>
-                      <a:round/>
-                      <a:headEnd type="none" w="med" len="med"/>
-                      <a:tailEnd type="none" w="med" len="med"/>
-                    </a:lnB>
-                  </a:tcPr>
-                </a:tc>
-                <a:tc>
-                  <a:txBody>
-                    <a:bodyPr/>
-                    <a:lstStyle/>
-                    <a:p>
-                      <a:pPr algn="r" indent="0" marL="0">
-                        <a:buNone/>
-                      </a:pPr>
-                      <a:r>
-                        <a:rPr lang="en-US" sz="1400" b="1" dirty="0">
-                          <a:solidFill>
-                            <a:srgbClr val="1B2733"/>
-                          </a:solidFill>
-                          <a:latin typeface="Arial" pitchFamily="34" charset="0"/>
-                          <a:ea typeface="Arial" pitchFamily="34" charset="-122"/>
-                          <a:cs typeface="Arial" pitchFamily="34" charset="-120"/>
-                        </a:rPr>
-                        <a:t>Budget</a:t>
-                      </a:r>
-                      <a:endParaRPr lang="en-US" sz="1400" dirty="0">
-                        <a:latin typeface="Arial" charset="0"/>
-                        <a:ea typeface="Arial" charset="0"/>
-                        <a:cs typeface="Arial" charset="0"/>
-                      </a:endParaRPr>
-                    </a:p>
-                  </a:txBody>
-                  <a:tcPr marL="0" marR="100584" marT="0" marB="0" anchor="ctr">
-                    <a:lnL w="0" cap="flat" cmpd="sng" algn="ctr">
-                      <a:noFill/>
-                    </a:lnL>
-                    <a:lnR w="0" cap="flat" cmpd="sng" algn="ctr">
-                      <a:noFill/>
-                    </a:lnR>
-                    <a:lnT w="0" cap="flat" cmpd="sng" algn="ctr">
-                      <a:noFill/>
-                    </a:lnT>
-                    <a:lnB w="12700" cap="flat" cmpd="sng" algn="ctr">
-                      <a:solidFill>
-                        <a:srgbClr val="1B2733"/>
-                      </a:solidFill>
-                      <a:prstDash val="solid"/>
-                      <a:round/>
-                      <a:headEnd type="none" w="med" len="med"/>
-                      <a:tailEnd type="none" w="med" len="med"/>
-                    </a:lnB>
-                  </a:tcPr>
-                </a:tc>
-              </a:tr>
-              <a:tr h="508000">
-                <a:tc>
-                  <a:txBody>
-                    <a:bodyPr/>
-                    <a:lstStyle/>
-                    <a:p>
-                      <a:pPr algn="l" indent="0" marL="0">
-                        <a:buNone/>
-                      </a:pPr>
-                      <a:r>
-                        <a:rPr lang="en-US" sz="1400" dirty="0">
-                          <a:solidFill>
-                            <a:srgbClr val="1B2733"/>
-                          </a:solidFill>
-                          <a:latin typeface="Arial" pitchFamily="34" charset="0"/>
-                          <a:ea typeface="Arial" pitchFamily="34" charset="-122"/>
-                          <a:cs typeface="Arial" pitchFamily="34" charset="-120"/>
-                        </a:rPr>
-                        <a:t>Bestellung von 4 Flugzeugen</a:t>
-                      </a:r>
-                      <a:endParaRPr lang="en-US" sz="1400" dirty="0">
-                        <a:latin typeface="Arial" charset="0"/>
-                        <a:ea typeface="Arial" charset="0"/>
-                        <a:cs typeface="Arial" charset="0"/>
-                      </a:endParaRPr>
-                    </a:p>
-                  </a:txBody>
-                  <a:tcPr marL="0" marR="100584" marT="0" marB="0" anchor="ctr">
-                    <a:lnL w="0" cap="flat" cmpd="sng" algn="ctr">
-                      <a:noFill/>
-                    </a:lnL>
-                    <a:lnR w="0" cap="flat" cmpd="sng" algn="ctr">
-                      <a:noFill/>
-                    </a:lnR>
-                    <a:lnT w="0" cap="flat" cmpd="sng" algn="ctr">
-                      <a:noFill/>
-                    </a:lnT>
-                    <a:lnB w="9525" cap="flat" cmpd="sng" algn="ctr">
-                      <a:solidFill>
-                        <a:srgbClr val="D0D5DB"/>
-                      </a:solidFill>
-                      <a:prstDash val="solid"/>
-                      <a:round/>
-                      <a:headEnd type="none" w="med" len="med"/>
-                      <a:tailEnd type="none" w="med" len="med"/>
-                    </a:lnB>
-                  </a:tcPr>
-                </a:tc>
-                <a:tc>
-                  <a:txBody>
-                    <a:bodyPr/>
-                    <a:lstStyle/>
-                    <a:p>
-                      <a:pPr algn="r" indent="0" marL="0">
-                        <a:buNone/>
-                      </a:pPr>
-                      <a:r>
-                        <a:rPr lang="en-US" sz="1400" dirty="0">
-                          <a:solidFill>
-                            <a:srgbClr val="1B2733"/>
-                          </a:solidFill>
-                          <a:latin typeface="Arial" pitchFamily="34" charset="0"/>
-                          <a:ea typeface="Arial" pitchFamily="34" charset="-122"/>
-                          <a:cs typeface="Arial" pitchFamily="34" charset="-120"/>
-                        </a:rPr>
-                        <a:t>Q1 2027</a:t>
-                      </a:r>
-                      <a:endParaRPr lang="en-US" sz="1400" dirty="0">
-                        <a:latin typeface="Arial" charset="0"/>
-                        <a:ea typeface="Arial" charset="0"/>
-                        <a:cs typeface="Arial" charset="0"/>
-                      </a:endParaRPr>
-                    </a:p>
-                  </a:txBody>
-                  <a:tcPr marL="0" marR="100584" marT="0" marB="0" anchor="ctr">
-                    <a:lnL w="0" cap="flat" cmpd="sng" algn="ctr">
-                      <a:noFill/>
-                    </a:lnL>
-                    <a:lnR w="0" cap="flat" cmpd="sng" algn="ctr">
-                      <a:noFill/>
-                    </a:lnR>
-                    <a:lnT w="0" cap="flat" cmpd="sng" algn="ctr">
-                      <a:noFill/>
-                    </a:lnT>
-                    <a:lnB w="9525" cap="flat" cmpd="sng" algn="ctr">
-                      <a:solidFill>
-                        <a:srgbClr val="D0D5DB"/>
-                      </a:solidFill>
-                      <a:prstDash val="solid"/>
-                      <a:round/>
-                      <a:headEnd type="none" w="med" len="med"/>
-                      <a:tailEnd type="none" w="med" len="med"/>
-                    </a:lnB>
-                  </a:tcPr>
-                </a:tc>
-                <a:tc>
-                  <a:txBody>
-                    <a:bodyPr/>
-                    <a:lstStyle/>
-                    <a:p>
-                      <a:pPr algn="r" indent="0" marL="0">
-                        <a:buNone/>
-                      </a:pPr>
-                      <a:r>
-                        <a:rPr lang="en-US" sz="1400" dirty="0">
-                          <a:solidFill>
-                            <a:srgbClr val="1B2733"/>
-                          </a:solidFill>
-                          <a:latin typeface="Arial" pitchFamily="34" charset="0"/>
-                          <a:ea typeface="Arial" pitchFamily="34" charset="-122"/>
-                          <a:cs typeface="Arial" pitchFamily="34" charset="-120"/>
-                        </a:rPr>
-                        <a:t>39,2 Mio. €</a:t>
-                      </a:r>
-                      <a:endParaRPr lang="en-US" sz="1400" dirty="0">
-                        <a:latin typeface="Arial" charset="0"/>
-                        <a:ea typeface="Arial" charset="0"/>
-                        <a:cs typeface="Arial" charset="0"/>
-                      </a:endParaRPr>
-                    </a:p>
-                  </a:txBody>
-                  <a:tcPr marL="0" marR="100584" marT="0" marB="0" anchor="ctr">
-                    <a:lnL w="0" cap="flat" cmpd="sng" algn="ctr">
-                      <a:noFill/>
-                    </a:lnL>
-                    <a:lnR w="0" cap="flat" cmpd="sng" algn="ctr">
-                      <a:noFill/>
-                    </a:lnR>
-                    <a:lnT w="0" cap="flat" cmpd="sng" algn="ctr">
-                      <a:noFill/>
-                    </a:lnT>
-                    <a:lnB w="9525" cap="flat" cmpd="sng" algn="ctr">
-                      <a:solidFill>
-                        <a:srgbClr val="D0D5DB"/>
-                      </a:solidFill>
-                      <a:prstDash val="solid"/>
-                      <a:round/>
-                      <a:headEnd type="none" w="med" len="med"/>
-                      <a:tailEnd type="none" w="med" len="med"/>
-                    </a:lnB>
-                  </a:tcPr>
-                </a:tc>
-              </a:tr>
-              <a:tr h="508000">
-                <a:tc>
-                  <a:txBody>
-                    <a:bodyPr/>
-                    <a:lstStyle/>
-                    <a:p>
-                      <a:pPr algn="l" indent="0" marL="0">
-                        <a:buNone/>
-                      </a:pPr>
-                      <a:r>
-                        <a:rPr lang="en-US" sz="1400" dirty="0">
-                          <a:solidFill>
-                            <a:srgbClr val="1B2733"/>
-                          </a:solidFill>
-                          <a:latin typeface="Arial" pitchFamily="34" charset="0"/>
-                          <a:ea typeface="Arial" pitchFamily="34" charset="-122"/>
-                          <a:cs typeface="Arial" pitchFamily="34" charset="-120"/>
-                        </a:rPr>
-                        <a:t>Ladeinfrastruktur an 2 Flughäfen</a:t>
-                      </a:r>
-                      <a:endParaRPr lang="en-US" sz="1400" dirty="0">
-                        <a:latin typeface="Arial" charset="0"/>
-                        <a:ea typeface="Arial" charset="0"/>
-                        <a:cs typeface="Arial" charset="0"/>
-                      </a:endParaRPr>
-                    </a:p>
-                  </a:txBody>
-                  <a:tcPr marL="0" marR="100584" marT="0" marB="0" anchor="ctr">
-                    <a:lnL w="0" cap="flat" cmpd="sng" algn="ctr">
-                      <a:noFill/>
-                    </a:lnL>
-                    <a:lnR w="0" cap="flat" cmpd="sng" algn="ctr">
-                      <a:noFill/>
-                    </a:lnR>
-                    <a:lnT w="0" cap="flat" cmpd="sng" algn="ctr">
-                      <a:noFill/>
-                    </a:lnT>
-                    <a:lnB w="9525" cap="flat" cmpd="sng" algn="ctr">
-                      <a:solidFill>
-                        <a:srgbClr val="D0D5DB"/>
-                      </a:solidFill>
-                      <a:prstDash val="solid"/>
-                      <a:round/>
-                      <a:headEnd type="none" w="med" len="med"/>
-                      <a:tailEnd type="none" w="med" len="med"/>
-                    </a:lnB>
-                  </a:tcPr>
-                </a:tc>
-                <a:tc>
-                  <a:txBody>
-                    <a:bodyPr/>
-                    <a:lstStyle/>
-                    <a:p>
-                      <a:pPr algn="r" indent="0" marL="0">
-                        <a:buNone/>
-                      </a:pPr>
-                      <a:r>
-                        <a:rPr lang="en-US" sz="1400" dirty="0">
-                          <a:solidFill>
-                            <a:srgbClr val="1B2733"/>
-                          </a:solidFill>
-                          <a:latin typeface="Arial" pitchFamily="34" charset="0"/>
-                          <a:ea typeface="Arial" pitchFamily="34" charset="-122"/>
-                          <a:cs typeface="Arial" pitchFamily="34" charset="-120"/>
-                        </a:rPr>
-                        <a:t>Q3 2027</a:t>
-                      </a:r>
-                      <a:endParaRPr lang="en-US" sz="1400" dirty="0">
-                        <a:latin typeface="Arial" charset="0"/>
-                        <a:ea typeface="Arial" charset="0"/>
-                        <a:cs typeface="Arial" charset="0"/>
-                      </a:endParaRPr>
-                    </a:p>
-                  </a:txBody>
-                  <a:tcPr marL="0" marR="100584" marT="0" marB="0" anchor="ctr">
-                    <a:lnL w="0" cap="flat" cmpd="sng" algn="ctr">
-                      <a:noFill/>
-                    </a:lnL>
-                    <a:lnR w="0" cap="flat" cmpd="sng" algn="ctr">
-                      <a:noFill/>
-                    </a:lnR>
-                    <a:lnT w="0" cap="flat" cmpd="sng" algn="ctr">
-                      <a:noFill/>
-                    </a:lnT>
-                    <a:lnB w="9525" cap="flat" cmpd="sng" algn="ctr">
-                      <a:solidFill>
-                        <a:srgbClr val="D0D5DB"/>
-                      </a:solidFill>
-                      <a:prstDash val="solid"/>
-                      <a:round/>
-                      <a:headEnd type="none" w="med" len="med"/>
-                      <a:tailEnd type="none" w="med" len="med"/>
-                    </a:lnB>
-                  </a:tcPr>
-                </a:tc>
-                <a:tc>
-                  <a:txBody>
-                    <a:bodyPr/>
-                    <a:lstStyle/>
-                    <a:p>
-                      <a:pPr algn="r" indent="0" marL="0">
-                        <a:buNone/>
-                      </a:pPr>
-                      <a:r>
-                        <a:rPr lang="en-US" sz="1400" dirty="0">
-                          <a:solidFill>
-                            <a:srgbClr val="1B2733"/>
-                          </a:solidFill>
-                          <a:latin typeface="Arial" pitchFamily="34" charset="0"/>
-                          <a:ea typeface="Arial" pitchFamily="34" charset="-122"/>
-                          <a:cs typeface="Arial" pitchFamily="34" charset="-120"/>
-                        </a:rPr>
-                        <a:t>6,0 Mio. €</a:t>
-                      </a:r>
-                      <a:endParaRPr lang="en-US" sz="1400" dirty="0">
-                        <a:latin typeface="Arial" charset="0"/>
-                        <a:ea typeface="Arial" charset="0"/>
-                        <a:cs typeface="Arial" charset="0"/>
-                      </a:endParaRPr>
-                    </a:p>
-                  </a:txBody>
-                  <a:tcPr marL="0" marR="100584" marT="0" marB="0" anchor="ctr">
-                    <a:lnL w="0" cap="flat" cmpd="sng" algn="ctr">
-                      <a:noFill/>
-                    </a:lnL>
-                    <a:lnR w="0" cap="flat" cmpd="sng" algn="ctr">
-                      <a:noFill/>
-                    </a:lnR>
-                    <a:lnT w="0" cap="flat" cmpd="sng" algn="ctr">
-                      <a:noFill/>
-                    </a:lnT>
-                    <a:lnB w="9525" cap="flat" cmpd="sng" algn="ctr">
-                      <a:solidFill>
-                        <a:srgbClr val="D0D5DB"/>
-                      </a:solidFill>
-                      <a:prstDash val="solid"/>
-                      <a:round/>
-                      <a:headEnd type="none" w="med" len="med"/>
-                      <a:tailEnd type="none" w="med" len="med"/>
-                    </a:lnB>
-                  </a:tcPr>
-                </a:tc>
-              </a:tr>
-              <a:tr h="508000">
-                <a:tc>
-                  <a:txBody>
-                    <a:bodyPr/>
-                    <a:lstStyle/>
-                    <a:p>
-                      <a:pPr algn="l" indent="0" marL="0">
-                        <a:buNone/>
-                      </a:pPr>
-                      <a:r>
-                        <a:rPr lang="en-US" sz="1400" dirty="0">
-                          <a:solidFill>
-                            <a:srgbClr val="1B2733"/>
-                          </a:solidFill>
-                          <a:latin typeface="Arial" pitchFamily="34" charset="0"/>
-                          <a:ea typeface="Arial" pitchFamily="34" charset="-122"/>
-                          <a:cs typeface="Arial" pitchFamily="34" charset="-120"/>
-                        </a:rPr>
-                        <a:t>Pilotbetrieb auf 3 Strecken</a:t>
-                      </a:r>
-                      <a:endParaRPr lang="en-US" sz="1400" dirty="0">
-                        <a:latin typeface="Arial" charset="0"/>
-                        <a:ea typeface="Arial" charset="0"/>
-                        <a:cs typeface="Arial" charset="0"/>
-                      </a:endParaRPr>
-                    </a:p>
-                  </a:txBody>
-                  <a:tcPr marL="0" marR="100584" marT="0" marB="0" anchor="ctr">
-                    <a:lnL w="0" cap="flat" cmpd="sng" algn="ctr">
-                      <a:noFill/>
-                    </a:lnL>
-                    <a:lnR w="0" cap="flat" cmpd="sng" algn="ctr">
-                      <a:noFill/>
-                    </a:lnR>
-                    <a:lnT w="0" cap="flat" cmpd="sng" algn="ctr">
-                      <a:noFill/>
-                    </a:lnT>
-                    <a:lnB w="9525" cap="flat" cmpd="sng" algn="ctr">
-                      <a:solidFill>
-                        <a:srgbClr val="D0D5DB"/>
-                      </a:solidFill>
-                      <a:prstDash val="solid"/>
-                      <a:round/>
-                      <a:headEnd type="none" w="med" len="med"/>
-                      <a:tailEnd type="none" w="med" len="med"/>
-                    </a:lnB>
-                  </a:tcPr>
-                </a:tc>
-                <a:tc>
-                  <a:txBody>
-                    <a:bodyPr/>
-                    <a:lstStyle/>
-                    <a:p>
-                      <a:pPr algn="r" indent="0" marL="0">
-                        <a:buNone/>
-                      </a:pPr>
-                      <a:r>
-                        <a:rPr lang="en-US" sz="1400" dirty="0">
-                          <a:solidFill>
-                            <a:srgbClr val="1B2733"/>
-                          </a:solidFill>
-                          <a:latin typeface="Arial" pitchFamily="34" charset="0"/>
-                          <a:ea typeface="Arial" pitchFamily="34" charset="-122"/>
-                          <a:cs typeface="Arial" pitchFamily="34" charset="-120"/>
-                        </a:rPr>
-                        <a:t>ab Q2 2028</a:t>
-                      </a:r>
-                      <a:endParaRPr lang="en-US" sz="1400" dirty="0">
-                        <a:latin typeface="Arial" charset="0"/>
-                        <a:ea typeface="Arial" charset="0"/>
-                        <a:cs typeface="Arial" charset="0"/>
-                      </a:endParaRPr>
-                    </a:p>
-                  </a:txBody>
-                  <a:tcPr marL="0" marR="100584" marT="0" marB="0" anchor="ctr">
-                    <a:lnL w="0" cap="flat" cmpd="sng" algn="ctr">
-                      <a:noFill/>
-                    </a:lnL>
-                    <a:lnR w="0" cap="flat" cmpd="sng" algn="ctr">
-                      <a:noFill/>
-                    </a:lnR>
-                    <a:lnT w="0" cap="flat" cmpd="sng" algn="ctr">
-                      <a:noFill/>
-                    </a:lnT>
-                    <a:lnB w="9525" cap="flat" cmpd="sng" algn="ctr">
-                      <a:solidFill>
-                        <a:srgbClr val="D0D5DB"/>
-                      </a:solidFill>
-                      <a:prstDash val="solid"/>
-                      <a:round/>
-                      <a:headEnd type="none" w="med" len="med"/>
-                      <a:tailEnd type="none" w="med" len="med"/>
-                    </a:lnB>
-                  </a:tcPr>
-                </a:tc>
-                <a:tc>
-                  <a:txBody>
-                    <a:bodyPr/>
-                    <a:lstStyle/>
-                    <a:p>
-                      <a:pPr algn="r" indent="0" marL="0">
-                        <a:buNone/>
-                      </a:pPr>
-                      <a:r>
-                        <a:rPr lang="en-US" sz="1400" dirty="0">
-                          <a:solidFill>
-                            <a:srgbClr val="1B2733"/>
-                          </a:solidFill>
-                          <a:latin typeface="Arial" pitchFamily="34" charset="0"/>
-                          <a:ea typeface="Arial" pitchFamily="34" charset="-122"/>
-                          <a:cs typeface="Arial" pitchFamily="34" charset="-120"/>
-                        </a:rPr>
-                        <a:t>4,0 Mio. €</a:t>
-                      </a:r>
-                      <a:endParaRPr lang="en-US" sz="1400" dirty="0">
-                        <a:latin typeface="Arial" charset="0"/>
-                        <a:ea typeface="Arial" charset="0"/>
-                        <a:cs typeface="Arial" charset="0"/>
-                      </a:endParaRPr>
-                    </a:p>
-                  </a:txBody>
-                  <a:tcPr marL="0" marR="100584" marT="0" marB="0" anchor="ctr">
-                    <a:lnL w="0" cap="flat" cmpd="sng" algn="ctr">
-                      <a:noFill/>
-                    </a:lnL>
-                    <a:lnR w="0" cap="flat" cmpd="sng" algn="ctr">
-                      <a:noFill/>
-                    </a:lnR>
-                    <a:lnT w="0" cap="flat" cmpd="sng" algn="ctr">
-                      <a:noFill/>
-                    </a:lnT>
-                    <a:lnB w="9525" cap="flat" cmpd="sng" algn="ctr">
-                      <a:solidFill>
-                        <a:srgbClr val="D0D5DB"/>
-                      </a:solidFill>
-                      <a:prstDash val="solid"/>
-                      <a:round/>
-                      <a:headEnd type="none" w="med" len="med"/>
-                      <a:tailEnd type="none" w="med" len="med"/>
-                    </a:lnB>
-                  </a:tcPr>
-                </a:tc>
-              </a:tr>
-              <a:tr h="508000">
-                <a:tc>
-                  <a:txBody>
-                    <a:bodyPr/>
-                    <a:lstStyle/>
-                    <a:p>
-                      <a:pPr algn="l" indent="0" marL="0">
-                        <a:buNone/>
-                      </a:pPr>
-                      <a:r>
-                        <a:rPr lang="en-US" sz="1400" dirty="0">
-                          <a:solidFill>
-                            <a:srgbClr val="1B2733"/>
-                          </a:solidFill>
-                          <a:latin typeface="Arial" pitchFamily="34" charset="0"/>
-                          <a:ea typeface="Arial" pitchFamily="34" charset="-122"/>
-                          <a:cs typeface="Arial" pitchFamily="34" charset="-120"/>
-                        </a:rPr>
-                        <a:t>Entscheidung über Serienausbau</a:t>
-                      </a:r>
-                      <a:endParaRPr lang="en-US" sz="1400" dirty="0">
-                        <a:latin typeface="Arial" charset="0"/>
-                        <a:ea typeface="Arial" charset="0"/>
-                        <a:cs typeface="Arial" charset="0"/>
-                      </a:endParaRPr>
-                    </a:p>
-                  </a:txBody>
-                  <a:tcPr marL="0" marR="100584" marT="0" marB="0" anchor="ctr">
-                    <a:lnL w="0" cap="flat" cmpd="sng" algn="ctr">
-                      <a:noFill/>
-                    </a:lnL>
-                    <a:lnR w="0" cap="flat" cmpd="sng" algn="ctr">
-                      <a:noFill/>
-                    </a:lnR>
-                    <a:lnT w="0" cap="flat" cmpd="sng" algn="ctr">
-                      <a:noFill/>
-                    </a:lnT>
-                    <a:lnB w="9525" cap="flat" cmpd="sng" algn="ctr">
-                      <a:solidFill>
-                        <a:srgbClr val="D0D5DB"/>
-                      </a:solidFill>
-                      <a:prstDash val="solid"/>
-                      <a:round/>
-                      <a:headEnd type="none" w="med" len="med"/>
-                      <a:tailEnd type="none" w="med" len="med"/>
-                    </a:lnB>
-                  </a:tcPr>
-                </a:tc>
-                <a:tc>
-                  <a:txBody>
-                    <a:bodyPr/>
-                    <a:lstStyle/>
-                    <a:p>
-                      <a:pPr algn="r" indent="0" marL="0">
-                        <a:buNone/>
-                      </a:pPr>
-                      <a:r>
-                        <a:rPr lang="en-US" sz="1400" dirty="0">
-                          <a:solidFill>
-                            <a:srgbClr val="1B2733"/>
-                          </a:solidFill>
-                          <a:latin typeface="Arial" pitchFamily="34" charset="0"/>
-                          <a:ea typeface="Arial" pitchFamily="34" charset="-122"/>
-                          <a:cs typeface="Arial" pitchFamily="34" charset="-120"/>
-                        </a:rPr>
-                        <a:t>Q4 2029</a:t>
-                      </a:r>
-                      <a:endParaRPr lang="en-US" sz="1400" dirty="0">
-                        <a:latin typeface="Arial" charset="0"/>
-                        <a:ea typeface="Arial" charset="0"/>
-                        <a:cs typeface="Arial" charset="0"/>
-                      </a:endParaRPr>
-                    </a:p>
-                  </a:txBody>
-                  <a:tcPr marL="0" marR="100584" marT="0" marB="0" anchor="ctr">
-                    <a:lnL w="0" cap="flat" cmpd="sng" algn="ctr">
-                      <a:noFill/>
-                    </a:lnL>
-                    <a:lnR w="0" cap="flat" cmpd="sng" algn="ctr">
-                      <a:noFill/>
-                    </a:lnR>
-                    <a:lnT w="0" cap="flat" cmpd="sng" algn="ctr">
-                      <a:noFill/>
-                    </a:lnT>
-                    <a:lnB w="9525" cap="flat" cmpd="sng" algn="ctr">
-                      <a:solidFill>
-                        <a:srgbClr val="D0D5DB"/>
-                      </a:solidFill>
-                      <a:prstDash val="solid"/>
-                      <a:round/>
-                      <a:headEnd type="none" w="med" len="med"/>
-                      <a:tailEnd type="none" w="med" len="med"/>
-                    </a:lnB>
-                  </a:tcPr>
-                </a:tc>
-                <a:tc>
-                  <a:txBody>
-                    <a:bodyPr/>
-                    <a:lstStyle/>
-                    <a:p>
-                      <a:pPr algn="r" indent="0" marL="0">
-                        <a:buNone/>
-                      </a:pPr>
-                      <a:r>
-                        <a:rPr lang="en-US" sz="1400" dirty="0">
-                          <a:solidFill>
-                            <a:srgbClr val="1B2733"/>
-                          </a:solidFill>
-                          <a:latin typeface="Arial" pitchFamily="34" charset="0"/>
-                          <a:ea typeface="Arial" pitchFamily="34" charset="-122"/>
-                          <a:cs typeface="Arial" pitchFamily="34" charset="-120"/>
-                        </a:rPr>
-                        <a:t>-</a:t>
-                      </a:r>
-                      <a:endParaRPr lang="en-US" sz="1400" dirty="0">
-                        <a:latin typeface="Arial" charset="0"/>
-                        <a:ea typeface="Arial" charset="0"/>
-                        <a:cs typeface="Arial" charset="0"/>
-                      </a:endParaRPr>
-                    </a:p>
-                  </a:txBody>
-                  <a:tcPr marL="0" marR="100584" marT="0" marB="0" anchor="ctr">
-                    <a:lnL w="0" cap="flat" cmpd="sng" algn="ctr">
-                      <a:noFill/>
-                    </a:lnL>
-                    <a:lnR w="0" cap="flat" cmpd="sng" algn="ctr">
-                      <a:noFill/>
-                    </a:lnR>
-                    <a:lnT w="0" cap="flat" cmpd="sng" algn="ctr">
-                      <a:noFill/>
-                    </a:lnT>
-                    <a:lnB w="9525" cap="flat" cmpd="sng" algn="ctr">
-                      <a:solidFill>
-                        <a:srgbClr val="D0D5DB"/>
-                      </a:solidFill>
-                      <a:prstDash val="solid"/>
-                      <a:round/>
-                      <a:headEnd type="none" w="med" len="med"/>
-                      <a:tailEnd type="none" w="med" len="med"/>
-                    </a:lnB>
-                  </a:tcPr>
-                </a:tc>
-              </a:tr>
-            </a:tbl>
-          </a:graphicData>
-        </a:graphic>
-      </p:graphicFrame>
-      <p:sp>
-        <p:nvSpPr>
-          <p:cNvPr id="4" name="Text 1"/>
+      <p:sp>
+        <p:nvSpPr>
+          <p:cNvPr id="3" name="Shape 1"/>
+          <p:cNvSpPr/>
+          <p:nvPr/>
+        </p:nvSpPr>
+        <p:spPr>
+          <a:xfrm>
+            <a:off x="609600" y="2032000"/>
+            <a:ext cx="10972800" cy="0"/>
+          </a:xfrm>
+          <a:prstGeom prst="line">
+            <a:avLst/>
+          </a:prstGeom>
+          <a:noFill/>
+          <a:ln w="19050">
+            <a:solidFill>
+              <a:srgbClr val="1B2733"/>
+            </a:solidFill>
+            <a:prstDash val="solid"/>
+          </a:ln>
+        </p:spPr>
+      </p:sp>
+      <p:sp>
+        <p:nvSpPr>
+          <p:cNvPr id="4" name="Shape 2"/>
+          <p:cNvSpPr/>
+          <p:nvPr/>
+        </p:nvSpPr>
+        <p:spPr>
+          <a:xfrm>
+            <a:off x="609600" y="1930400"/>
+            <a:ext cx="203200" cy="203200"/>
+          </a:xfrm>
+          <a:prstGeom prst="ellipse">
+            <a:avLst/>
+          </a:prstGeom>
+          <a:solidFill>
+            <a:srgbClr val="C2410C"/>
+          </a:solidFill>
+          <a:ln/>
+        </p:spPr>
+      </p:sp>
+      <p:sp>
+        <p:nvSpPr>
+          <p:cNvPr id="5" name="Text 3"/>
           <p:cNvSpPr txBox="1"/>
           <p:nvPr/>
         </p:nvSpPr>
         <p:spPr>
           <a:xfrm>
-            <a:off x="609600" y="4775200"/>
-            <a:ext cx="10972800" cy="406400"/>
+            <a:off x="609600" y="2336800"/>
+            <a:ext cx="2438400" cy="1219200"/>
           </a:xfrm>
           <a:prstGeom prst="rect">
             <a:avLst/>
@@ -5816,12 +5535,402 @@
           <a:lstStyle/>
           <a:p>
             <a:pPr algn="l" indent="0" marL="0">
+              <a:spcAft>
+                <a:spcPts val="400"/>
+              </a:spcAft>
               <a:buNone/>
             </a:pPr>
             <a:r>
-              <a:rPr lang="en-US" sz="1800" dirty="0">
+              <a:rPr lang="en-US" sz="1400" b="1" dirty="0">
                 <a:solidFill>
-                  <a:srgbClr val="C2410C"/>
+                  <a:srgbClr val="1B2733"/>
+                </a:solidFill>
+                <a:latin typeface="Arial" pitchFamily="34" charset="0"/>
+                <a:ea typeface="Arial" pitchFamily="34" charset="-122"/>
+                <a:cs typeface="Arial" pitchFamily="34" charset="-120"/>
+              </a:rPr>
+              <a:t>Q1 2027</a:t>
+            </a:r>
+            <a:endParaRPr lang="en-US" sz="1400" dirty="0"/>
+          </a:p>
+          <a:p>
+            <a:pPr algn="l" indent="0" marL="0">
+              <a:spcAft>
+                <a:spcPts val="400"/>
+              </a:spcAft>
+              <a:buNone/>
+            </a:pPr>
+            <a:r>
+              <a:rPr lang="en-US" sz="1400" dirty="0">
+                <a:solidFill>
+                  <a:srgbClr val="1B2733"/>
+                </a:solidFill>
+                <a:latin typeface="Arial" pitchFamily="34" charset="0"/>
+                <a:ea typeface="Arial" pitchFamily="34" charset="-122"/>
+                <a:cs typeface="Arial" pitchFamily="34" charset="-120"/>
+              </a:rPr>
+              <a:t>Bestellung von 4 Flugzeugen</a:t>
+            </a:r>
+            <a:endParaRPr lang="en-US" sz="1400" dirty="0"/>
+          </a:p>
+          <a:p>
+            <a:pPr algn="l" indent="0" marL="0">
+              <a:spcAft>
+                <a:spcPts val="400"/>
+              </a:spcAft>
+              <a:buNone/>
+            </a:pPr>
+            <a:r>
+              <a:rPr lang="en-US" sz="1400" dirty="0">
+                <a:solidFill>
+                  <a:srgbClr val="1B2733"/>
+                </a:solidFill>
+                <a:latin typeface="Arial" pitchFamily="34" charset="0"/>
+                <a:ea typeface="Arial" pitchFamily="34" charset="-122"/>
+                <a:cs typeface="Arial" pitchFamily="34" charset="-120"/>
+              </a:rPr>
+              <a:t>39,2 Mio. €</a:t>
+            </a:r>
+            <a:endParaRPr lang="en-US" sz="1400" dirty="0"/>
+          </a:p>
+        </p:txBody>
+      </p:sp>
+      <p:sp>
+        <p:nvSpPr>
+          <p:cNvPr id="6" name="Shape 4"/>
+          <p:cNvSpPr/>
+          <p:nvPr/>
+        </p:nvSpPr>
+        <p:spPr>
+          <a:xfrm>
+            <a:off x="3454400" y="1930400"/>
+            <a:ext cx="203200" cy="203200"/>
+          </a:xfrm>
+          <a:prstGeom prst="ellipse">
+            <a:avLst/>
+          </a:prstGeom>
+          <a:solidFill>
+            <a:srgbClr val="C2410C"/>
+          </a:solidFill>
+          <a:ln/>
+        </p:spPr>
+      </p:sp>
+      <p:sp>
+        <p:nvSpPr>
+          <p:cNvPr id="7" name="Text 5"/>
+          <p:cNvSpPr txBox="1"/>
+          <p:nvPr/>
+        </p:nvSpPr>
+        <p:spPr>
+          <a:xfrm>
+            <a:off x="3454400" y="2336800"/>
+            <a:ext cx="2438400" cy="1219200"/>
+          </a:xfrm>
+          <a:prstGeom prst="rect">
+            <a:avLst/>
+          </a:prstGeom>
+          <a:noFill/>
+          <a:ln/>
+        </p:spPr>
+        <p:txBody>
+          <a:bodyPr wrap="square" lIns="0" tIns="0" rIns="0" bIns="0" rtlCol="0" anchor="t"/>
+          <a:lstStyle/>
+          <a:p>
+            <a:pPr algn="l" indent="0" marL="0">
+              <a:spcAft>
+                <a:spcPts val="400"/>
+              </a:spcAft>
+              <a:buNone/>
+            </a:pPr>
+            <a:r>
+              <a:rPr lang="en-US" sz="1400" b="1" dirty="0">
+                <a:solidFill>
+                  <a:srgbClr val="1B2733"/>
+                </a:solidFill>
+                <a:latin typeface="Arial" pitchFamily="34" charset="0"/>
+                <a:ea typeface="Arial" pitchFamily="34" charset="-122"/>
+                <a:cs typeface="Arial" pitchFamily="34" charset="-120"/>
+              </a:rPr>
+              <a:t>Q3 2027</a:t>
+            </a:r>
+            <a:endParaRPr lang="en-US" sz="1400" dirty="0"/>
+          </a:p>
+          <a:p>
+            <a:pPr algn="l" indent="0" marL="0">
+              <a:spcAft>
+                <a:spcPts val="400"/>
+              </a:spcAft>
+              <a:buNone/>
+            </a:pPr>
+            <a:r>
+              <a:rPr lang="en-US" sz="1400" dirty="0">
+                <a:solidFill>
+                  <a:srgbClr val="1B2733"/>
+                </a:solidFill>
+                <a:latin typeface="Arial" pitchFamily="34" charset="0"/>
+                <a:ea typeface="Arial" pitchFamily="34" charset="-122"/>
+                <a:cs typeface="Arial" pitchFamily="34" charset="-120"/>
+              </a:rPr>
+              <a:t>Ladeinfrastruktur an 2 Flughäfen</a:t>
+            </a:r>
+            <a:endParaRPr lang="en-US" sz="1400" dirty="0"/>
+          </a:p>
+          <a:p>
+            <a:pPr algn="l" indent="0" marL="0">
+              <a:spcAft>
+                <a:spcPts val="400"/>
+              </a:spcAft>
+              <a:buNone/>
+            </a:pPr>
+            <a:r>
+              <a:rPr lang="en-US" sz="1400" dirty="0">
+                <a:solidFill>
+                  <a:srgbClr val="1B2733"/>
+                </a:solidFill>
+                <a:latin typeface="Arial" pitchFamily="34" charset="0"/>
+                <a:ea typeface="Arial" pitchFamily="34" charset="-122"/>
+                <a:cs typeface="Arial" pitchFamily="34" charset="-120"/>
+              </a:rPr>
+              <a:t>6,0 Mio. €</a:t>
+            </a:r>
+            <a:endParaRPr lang="en-US" sz="1400" dirty="0"/>
+          </a:p>
+        </p:txBody>
+      </p:sp>
+      <p:sp>
+        <p:nvSpPr>
+          <p:cNvPr id="8" name="Shape 6"/>
+          <p:cNvSpPr/>
+          <p:nvPr/>
+        </p:nvSpPr>
+        <p:spPr>
+          <a:xfrm>
+            <a:off x="6299200" y="1930400"/>
+            <a:ext cx="203200" cy="203200"/>
+          </a:xfrm>
+          <a:prstGeom prst="ellipse">
+            <a:avLst/>
+          </a:prstGeom>
+          <a:solidFill>
+            <a:srgbClr val="C2410C"/>
+          </a:solidFill>
+          <a:ln/>
+        </p:spPr>
+      </p:sp>
+      <p:sp>
+        <p:nvSpPr>
+          <p:cNvPr id="9" name="Text 7"/>
+          <p:cNvSpPr txBox="1"/>
+          <p:nvPr/>
+        </p:nvSpPr>
+        <p:spPr>
+          <a:xfrm>
+            <a:off x="6299200" y="2336800"/>
+            <a:ext cx="2438400" cy="1219200"/>
+          </a:xfrm>
+          <a:prstGeom prst="rect">
+            <a:avLst/>
+          </a:prstGeom>
+          <a:noFill/>
+          <a:ln/>
+        </p:spPr>
+        <p:txBody>
+          <a:bodyPr wrap="square" lIns="0" tIns="0" rIns="0" bIns="0" rtlCol="0" anchor="t"/>
+          <a:lstStyle/>
+          <a:p>
+            <a:pPr algn="l" indent="0" marL="0">
+              <a:spcAft>
+                <a:spcPts val="400"/>
+              </a:spcAft>
+              <a:buNone/>
+            </a:pPr>
+            <a:r>
+              <a:rPr lang="en-US" sz="1400" b="1" dirty="0">
+                <a:solidFill>
+                  <a:srgbClr val="1B2733"/>
+                </a:solidFill>
+                <a:latin typeface="Arial" pitchFamily="34" charset="0"/>
+                <a:ea typeface="Arial" pitchFamily="34" charset="-122"/>
+                <a:cs typeface="Arial" pitchFamily="34" charset="-120"/>
+              </a:rPr>
+              <a:t>ab Q2 2028</a:t>
+            </a:r>
+            <a:endParaRPr lang="en-US" sz="1400" dirty="0"/>
+          </a:p>
+          <a:p>
+            <a:pPr algn="l" indent="0" marL="0">
+              <a:spcAft>
+                <a:spcPts val="400"/>
+              </a:spcAft>
+              <a:buNone/>
+            </a:pPr>
+            <a:r>
+              <a:rPr lang="en-US" sz="1400" dirty="0">
+                <a:solidFill>
+                  <a:srgbClr val="1B2733"/>
+                </a:solidFill>
+                <a:latin typeface="Arial" pitchFamily="34" charset="0"/>
+                <a:ea typeface="Arial" pitchFamily="34" charset="-122"/>
+                <a:cs typeface="Arial" pitchFamily="34" charset="-120"/>
+              </a:rPr>
+              <a:t>Pilotbetrieb auf 3 Strecken</a:t>
+            </a:r>
+            <a:endParaRPr lang="en-US" sz="1400" dirty="0"/>
+          </a:p>
+          <a:p>
+            <a:pPr algn="l" indent="0" marL="0">
+              <a:spcAft>
+                <a:spcPts val="400"/>
+              </a:spcAft>
+              <a:buNone/>
+            </a:pPr>
+            <a:r>
+              <a:rPr lang="en-US" sz="1400" dirty="0">
+                <a:solidFill>
+                  <a:srgbClr val="1B2733"/>
+                </a:solidFill>
+                <a:latin typeface="Arial" pitchFamily="34" charset="0"/>
+                <a:ea typeface="Arial" pitchFamily="34" charset="-122"/>
+                <a:cs typeface="Arial" pitchFamily="34" charset="-120"/>
+              </a:rPr>
+              <a:t>4,0 Mio. €</a:t>
+            </a:r>
+            <a:endParaRPr lang="en-US" sz="1400" dirty="0"/>
+          </a:p>
+        </p:txBody>
+      </p:sp>
+      <p:sp>
+        <p:nvSpPr>
+          <p:cNvPr id="10" name="Shape 8"/>
+          <p:cNvSpPr/>
+          <p:nvPr/>
+        </p:nvSpPr>
+        <p:spPr>
+          <a:xfrm>
+            <a:off x="9144000" y="1930400"/>
+            <a:ext cx="203200" cy="203200"/>
+          </a:xfrm>
+          <a:prstGeom prst="ellipse">
+            <a:avLst/>
+          </a:prstGeom>
+          <a:solidFill>
+            <a:srgbClr val="C2410C"/>
+          </a:solidFill>
+          <a:ln/>
+        </p:spPr>
+      </p:sp>
+      <p:sp>
+        <p:nvSpPr>
+          <p:cNvPr id="11" name="Text 9"/>
+          <p:cNvSpPr txBox="1"/>
+          <p:nvPr/>
+        </p:nvSpPr>
+        <p:spPr>
+          <a:xfrm>
+            <a:off x="9144000" y="2336800"/>
+            <a:ext cx="2438400" cy="1219200"/>
+          </a:xfrm>
+          <a:prstGeom prst="rect">
+            <a:avLst/>
+          </a:prstGeom>
+          <a:noFill/>
+          <a:ln/>
+        </p:spPr>
+        <p:txBody>
+          <a:bodyPr wrap="square" lIns="0" tIns="0" rIns="0" bIns="0" rtlCol="0" anchor="t"/>
+          <a:lstStyle/>
+          <a:p>
+            <a:pPr algn="l" indent="0" marL="0">
+              <a:spcAft>
+                <a:spcPts val="400"/>
+              </a:spcAft>
+              <a:buNone/>
+            </a:pPr>
+            <a:r>
+              <a:rPr lang="en-US" sz="1400" b="1" dirty="0">
+                <a:solidFill>
+                  <a:srgbClr val="1B2733"/>
+                </a:solidFill>
+                <a:latin typeface="Arial" pitchFamily="34" charset="0"/>
+                <a:ea typeface="Arial" pitchFamily="34" charset="-122"/>
+                <a:cs typeface="Arial" pitchFamily="34" charset="-120"/>
+              </a:rPr>
+              <a:t>Q4 2029</a:t>
+            </a:r>
+            <a:endParaRPr lang="en-US" sz="1400" dirty="0"/>
+          </a:p>
+          <a:p>
+            <a:pPr algn="l" indent="0" marL="0">
+              <a:spcAft>
+                <a:spcPts val="400"/>
+              </a:spcAft>
+              <a:buNone/>
+            </a:pPr>
+            <a:r>
+              <a:rPr lang="en-US" sz="1400" dirty="0">
+                <a:solidFill>
+                  <a:srgbClr val="1B2733"/>
+                </a:solidFill>
+                <a:latin typeface="Arial" pitchFamily="34" charset="0"/>
+                <a:ea typeface="Arial" pitchFamily="34" charset="-122"/>
+                <a:cs typeface="Arial" pitchFamily="34" charset="-120"/>
+              </a:rPr>
+              <a:t>Entscheidung über Serienausbau</a:t>
+            </a:r>
+            <a:endParaRPr lang="en-US" sz="1400" dirty="0"/>
+          </a:p>
+          <a:p>
+            <a:pPr algn="l" indent="0" marL="0">
+              <a:spcAft>
+                <a:spcPts val="400"/>
+              </a:spcAft>
+              <a:buNone/>
+            </a:pPr>
+            <a:r>
+              <a:rPr lang="en-US" sz="1400" dirty="0">
+                <a:solidFill>
+                  <a:srgbClr val="1B2733"/>
+                </a:solidFill>
+                <a:latin typeface="Arial" pitchFamily="34" charset="0"/>
+                <a:ea typeface="Arial" pitchFamily="34" charset="-122"/>
+                <a:cs typeface="Arial" pitchFamily="34" charset="-120"/>
+              </a:rPr>
+              <a:t>offen</a:t>
+            </a:r>
+            <a:endParaRPr lang="en-US" sz="1400" dirty="0"/>
+          </a:p>
+        </p:txBody>
+      </p:sp>
+      <p:sp>
+        <p:nvSpPr>
+          <p:cNvPr id="12" name="Text 10"/>
+          <p:cNvSpPr txBox="1"/>
+          <p:nvPr/>
+        </p:nvSpPr>
+        <p:spPr>
+          <a:xfrm>
+            <a:off x="609600" y="4267200"/>
+            <a:ext cx="10972800" cy="1219200"/>
+          </a:xfrm>
+          <a:prstGeom prst="rect">
+            <a:avLst/>
+          </a:prstGeom>
+          <a:solidFill>
+            <a:srgbClr val="C2410C"/>
+          </a:solidFill>
+          <a:ln/>
+        </p:spPr>
+        <p:txBody>
+          <a:bodyPr wrap="square" lIns="304800" tIns="0" rIns="304800" bIns="0" rtlCol="0" anchor="ctr"/>
+          <a:lstStyle/>
+          <a:p>
+            <a:pPr algn="l" indent="0" marL="0">
+              <a:buNone/>
+            </a:pPr>
+            <a:r>
+              <a:rPr lang="en-US" sz="1800" b="1" dirty="0">
+                <a:solidFill>
+                  <a:srgbClr val="FFFFFF"/>
                 </a:solidFill>
                 <a:latin typeface="Arial" pitchFamily="34" charset="0"/>
                 <a:ea typeface="Arial" pitchFamily="34" charset="-122"/>
@@ -5835,7 +5944,7 @@
       </p:sp>
       <p:sp>
         <p:nvSpPr>
-          <p:cNvPr id="5" name="Text 2"/>
+          <p:cNvPr id="13" name="Text 11"/>
           <p:cNvSpPr txBox="1"/>
           <p:nvPr/>
         </p:nvSpPr>
